--- a/3-CLINICAL_RESEARCH/3-Clinical-Research-Cutting-Edge.pptx
+++ b/3-CLINICAL_RESEARCH/3-Clinical-Research-Cutting-Edge.pptx
@@ -172,7 +172,7 @@
           <a:bodyPr vert="horz" lIns="91440" tIns="45720" rIns="91440" bIns="45720" rtlCol="0"/>
           <a:lstStyle>
             <a:lvl1pPr algn="l">
-              <a:defRPr sz="1200"/>
+              <a:defRPr sz="4200"/>
             </a:lvl1pPr>
           </a:lstStyle>
           <a:p>
@@ -203,7 +203,7 @@
           <a:bodyPr vert="horz" lIns="91440" tIns="45720" rIns="91440" bIns="45720" rtlCol="0"/>
           <a:lstStyle>
             <a:lvl1pPr algn="r">
-              <a:defRPr sz="1200"/>
+              <a:defRPr sz="4200"/>
             </a:lvl1pPr>
           </a:lstStyle>
           <a:p>
@@ -330,7 +330,7 @@
           <a:bodyPr vert="horz" lIns="91440" tIns="45720" rIns="91440" bIns="45720" rtlCol="0" anchor="b"/>
           <a:lstStyle>
             <a:lvl1pPr algn="l">
-              <a:defRPr sz="1200"/>
+              <a:defRPr sz="4200"/>
             </a:lvl1pPr>
           </a:lstStyle>
           <a:p>
@@ -361,7 +361,7 @@
           <a:bodyPr vert="horz" lIns="91440" tIns="45720" rIns="91440" bIns="45720" rtlCol="0" anchor="b"/>
           <a:lstStyle>
             <a:lvl1pPr algn="r">
-              <a:defRPr sz="1200"/>
+              <a:defRPr sz="4200"/>
             </a:lvl1pPr>
           </a:lstStyle>
           <a:p>
@@ -383,7 +383,7 @@
   <p:clrMap bg1="lt1" tx1="dk1" bg2="lt2" tx2="dk2" accent1="accent1" accent2="accent2" accent3="accent3" accent4="accent4" accent5="accent5" accent6="accent6" hlink="hlink" folHlink="folHlink"/>
   <p:notesStyle>
     <a:lvl1pPr marL="0" algn="l" defTabSz="914400" rtl="0" eaLnBrk="1" latinLnBrk="0" hangingPunct="1">
-      <a:defRPr sz="1200" kern="1200">
+      <a:defRPr sz="4200" kern="1200">
         <a:solidFill>
           <a:schemeClr val="tx1"/>
         </a:solidFill>
@@ -393,7 +393,7 @@
       </a:defRPr>
     </a:lvl1pPr>
     <a:lvl2pPr marL="457200" algn="l" defTabSz="914400" rtl="0" eaLnBrk="1" latinLnBrk="0" hangingPunct="1">
-      <a:defRPr sz="1200" kern="1200">
+      <a:defRPr sz="4200" kern="1200">
         <a:solidFill>
           <a:schemeClr val="tx1"/>
         </a:solidFill>
@@ -403,7 +403,7 @@
       </a:defRPr>
     </a:lvl2pPr>
     <a:lvl3pPr marL="914400" algn="l" defTabSz="914400" rtl="0" eaLnBrk="1" latinLnBrk="0" hangingPunct="1">
-      <a:defRPr sz="1200" kern="1200">
+      <a:defRPr sz="4200" kern="1200">
         <a:solidFill>
           <a:schemeClr val="tx1"/>
         </a:solidFill>
@@ -413,7 +413,7 @@
       </a:defRPr>
     </a:lvl3pPr>
     <a:lvl4pPr marL="1371600" algn="l" defTabSz="914400" rtl="0" eaLnBrk="1" latinLnBrk="0" hangingPunct="1">
-      <a:defRPr sz="1200" kern="1200">
+      <a:defRPr sz="4200" kern="1200">
         <a:solidFill>
           <a:schemeClr val="tx1"/>
         </a:solidFill>
@@ -423,7 +423,7 @@
       </a:defRPr>
     </a:lvl4pPr>
     <a:lvl5pPr marL="1828800" algn="l" defTabSz="914400" rtl="0" eaLnBrk="1" latinLnBrk="0" hangingPunct="1">
-      <a:defRPr sz="1200" kern="1200">
+      <a:defRPr sz="4200" kern="1200">
         <a:solidFill>
           <a:schemeClr val="tx1"/>
         </a:solidFill>
@@ -433,7 +433,7 @@
       </a:defRPr>
     </a:lvl5pPr>
     <a:lvl6pPr marL="2286000" algn="l" defTabSz="914400" rtl="0" eaLnBrk="1" latinLnBrk="0" hangingPunct="1">
-      <a:defRPr sz="1200" kern="1200">
+      <a:defRPr sz="4200" kern="1200">
         <a:solidFill>
           <a:schemeClr val="tx1"/>
         </a:solidFill>
@@ -443,7 +443,7 @@
       </a:defRPr>
     </a:lvl6pPr>
     <a:lvl7pPr marL="2743200" algn="l" defTabSz="914400" rtl="0" eaLnBrk="1" latinLnBrk="0" hangingPunct="1">
-      <a:defRPr sz="1200" kern="1200">
+      <a:defRPr sz="4200" kern="1200">
         <a:solidFill>
           <a:schemeClr val="tx1"/>
         </a:solidFill>
@@ -453,7 +453,7 @@
       </a:defRPr>
     </a:lvl7pPr>
     <a:lvl8pPr marL="3200400" algn="l" defTabSz="914400" rtl="0" eaLnBrk="1" latinLnBrk="0" hangingPunct="1">
-      <a:defRPr sz="1200" kern="1200">
+      <a:defRPr sz="4200" kern="1200">
         <a:solidFill>
           <a:schemeClr val="tx1"/>
         </a:solidFill>
@@ -463,7 +463,7 @@
       </a:defRPr>
     </a:lvl8pPr>
     <a:lvl9pPr marL="3657600" algn="l" defTabSz="914400" rtl="0" eaLnBrk="1" latinLnBrk="0" hangingPunct="1">
-      <a:defRPr sz="1200" kern="1200">
+      <a:defRPr sz="4200" kern="1200">
         <a:solidFill>
           <a:schemeClr val="tx1"/>
         </a:solidFill>
@@ -521,10 +521,33 @@
           <a:lstStyle/>
           <a:p>
             <a:r>
-              <a:rPr lang="en-US" dirty="0"/>
-              <a:t/>
-            </a:r>
-            <a:endParaRPr lang="en-US" dirty="0"/>
+              <a:rPr sz="4200"/>
+              <a:t>TITLE SLIDE</a:t>
+            </a:r>
+          </a:p>
+          <a:p>
+            <a:r>
+              <a:rPr sz="4200"/>
+              <a:t>"Clinical Research at the Cutting Edge"</a:t>
+            </a:r>
+          </a:p>
+          <a:p>
+            <a:r>
+              <a:rPr sz="4200"/>
+              <a:t>Presentation 3 of 5. Duration: 45 minutes (11:15-12:00).</a:t>
+            </a:r>
+          </a:p>
+          <a:p>
+            <a:r>
+              <a:rPr sz="4200"/>
+              <a:t>Format: Conversational, low resolution, room for questions throughout.</a:t>
+            </a:r>
+          </a:p>
+          <a:p>
+            <a:r>
+              <a:rPr sz="4200"/>
+              <a:t>Follows: SARF Intro (framework) and Why Family (catastrophes).</a:t>
+            </a:r>
           </a:p>
         </p:txBody>
       </p:sp>
@@ -609,10 +632,52 @@
           <a:lstStyle/>
           <a:p>
             <a:r>
-              <a:rPr lang="en-US" dirty="0"/>
-              <a:t/>
-            </a:r>
-            <a:endParaRPr lang="en-US" dirty="0"/>
+              <a:rPr sz="4200"/>
+              <a:t>THE KILLER COMBO: IRR + AI</a:t>
+            </a:r>
+          </a:p>
+          <a:p>
+            <a:r>
+              <a:rPr sz="4200"/>
+              <a:t>"All AI needs is IRR."</a:t>
+            </a:r>
+          </a:p>
+          <a:p>
+            <a:r>
+              <a:rPr sz="4200"/>
+              <a:t>What AI Requires → What IRR Provides:</a:t>
+            </a:r>
+          </a:p>
+          <a:p>
+            <a:r>
+              <a:rPr sz="4200"/>
+              <a:t>Labeled examples → Human-coded cases</a:t>
+            </a:r>
+          </a:p>
+          <a:p>
+            <a:r>
+              <a:rPr sz="4200"/>
+              <a:t>Consistent labels → Agreement-verified coding</a:t>
+            </a:r>
+          </a:p>
+          <a:p>
+            <a:r>
+              <a:rPr sz="4200"/>
+              <a:t>Scale → Growing database</a:t>
+            </a:r>
+          </a:p>
+          <a:p/>
+          <a:p>
+            <a:r>
+              <a:rPr sz="4200"/>
+              <a:t>A dataset with sufficient agreement IS ground truth.</a:t>
+            </a:r>
+          </a:p>
+          <a:p>
+            <a:r>
+              <a:rPr sz="4200"/>
+              <a:t>"IRR + AI = the breakthrough."</a:t>
+            </a:r>
           </a:p>
         </p:txBody>
       </p:sp>
@@ -697,10 +762,9 @@
           <a:lstStyle/>
           <a:p>
             <a:r>
-              <a:rPr lang="en-US" dirty="0"/>
-              <a:t/>
-            </a:r>
-            <a:endParaRPr lang="en-US" dirty="0"/>
+              <a:rPr sz="4200"/>
+              <a:t>SECTION IV: DISCOVERIES (10 min)</a:t>
+            </a:r>
           </a:p>
         </p:txBody>
       </p:sp>
@@ -785,10 +849,22 @@
           <a:lstStyle/>
           <a:p>
             <a:r>
-              <a:rPr lang="en-US" dirty="0"/>
-              <a:t/>
-            </a:r>
-            <a:endParaRPr lang="en-US" dirty="0"/>
+              <a:rPr sz="4200"/>
+              <a:t>KEY DISCOVERIES</a:t>
+            </a:r>
+          </a:p>
+          <a:p>
+            <a:r>
+              <a:rPr sz="4200"/>
+              <a:t>MUTUAL DISCOVERY: You can't survey for this data like a knee problem. The therapist must be in mutual discovery with the client. Not extracting answers—exploring together. The relationship affects what emerges. "If you just interrogate, you don't get the data you need."</a:t>
+            </a:r>
+          </a:p>
+          <a:p/>
+          <a:p>
+            <a:r>
+              <a:rPr sz="4200"/>
+              <a:t>SYNTHETIC DATA TRAINS FASTER: Working group learned SARF coding faster on synthetic data than real cases. Cleaner examples, known ground truth, faster iteration. "Real recordings are the goal. Synthetic data accelerates getting there."</a:t>
+            </a:r>
           </a:p>
         </p:txBody>
       </p:sp>
@@ -873,10 +949,45 @@
           <a:lstStyle/>
           <a:p>
             <a:r>
-              <a:rPr lang="en-US" dirty="0"/>
-              <a:t/>
-            </a:r>
-            <a:endParaRPr lang="en-US" dirty="0"/>
+              <a:rPr sz="4200"/>
+              <a:t>DISCOVERY: TIMELINES CLUSTER BY EMOTIONAL SALIENCE</a:t>
+            </a:r>
+          </a:p>
+          <a:p>
+            <a:r>
+              <a:rPr sz="4200"/>
+              <a:t>Timeline data naturally clusters into ~3-5 notable periods.</a:t>
+            </a:r>
+          </a:p>
+          <a:p>
+            <a:r>
+              <a:rPr sz="4200"/>
+              <a:t>- The client has a "sampling bias"—they report what's emotionally salient to them</a:t>
+            </a:r>
+          </a:p>
+          <a:p>
+            <a:r>
+              <a:rPr sz="4200"/>
+              <a:t>- They don't give you an even history; they give you the periods that matter</a:t>
+            </a:r>
+          </a:p>
+          <a:p>
+            <a:r>
+              <a:rPr sz="4200"/>
+              <a:t>- These clusters typically follow a nodal/triggering event</a:t>
+            </a:r>
+          </a:p>
+          <a:p>
+            <a:r>
+              <a:rPr sz="4200"/>
+              <a:t>- The clustering itself IS the emotional process—you don't have to know what to look for</a:t>
+            </a:r>
+          </a:p>
+          <a:p>
+            <a:r>
+              <a:rPr sz="4200"/>
+              <a:t>"The client's own selection bias is the data."</a:t>
+            </a:r>
           </a:p>
         </p:txBody>
       </p:sp>
@@ -961,10 +1072,45 @@
           <a:lstStyle/>
           <a:p>
             <a:r>
-              <a:rPr lang="en-US" dirty="0"/>
-              <a:t/>
-            </a:r>
-            <a:endParaRPr lang="en-US" dirty="0"/>
+              <a:rPr sz="4200"/>
+              <a:t>THE RESPONSIBILITY PATTERN</a:t>
+            </a:r>
+          </a:p>
+          <a:p>
+            <a:r>
+              <a:rPr sz="4200"/>
+              <a:t>Two 45-minute interviews. Person sees for the first time:</a:t>
+            </a:r>
+          </a:p>
+          <a:p>
+            <a:r>
+              <a:rPr sz="4200"/>
+              <a:t>- Pattern of constantly picking up responsibility</a:t>
+            </a:r>
+          </a:p>
+          <a:p>
+            <a:r>
+              <a:rPr sz="4200"/>
+              <a:t>- Saying yes to everything, no filter</a:t>
+            </a:r>
+          </a:p>
+          <a:p>
+            <a:r>
+              <a:rPr sz="4200"/>
+              <a:t>- Anxiety going up and up</a:t>
+            </a:r>
+          </a:p>
+          <a:p>
+            <a:r>
+              <a:rPr sz="4200"/>
+              <a:t>- No downs.</a:t>
+            </a:r>
+          </a:p>
+          <a:p>
+            <a:r>
+              <a:rPr sz="4200"/>
+              <a:t>"Just seeing the data organized was the breakthrough."</a:t>
+            </a:r>
           </a:p>
         </p:txBody>
       </p:sp>
@@ -1049,10 +1195,9 @@
           <a:lstStyle/>
           <a:p>
             <a:r>
-              <a:rPr lang="en-US" dirty="0"/>
-              <a:t/>
-            </a:r>
-            <a:endParaRPr lang="en-US" dirty="0"/>
+              <a:rPr sz="4200"/>
+              <a:t>SECTION V: WHAT BECOMES POSSIBLE (5 min)</a:t>
+            </a:r>
           </a:p>
         </p:txBody>
       </p:sp>
@@ -1137,10 +1282,27 @@
           <a:lstStyle/>
           <a:p>
             <a:r>
-              <a:rPr lang="en-US" dirty="0"/>
-              <a:t/>
-            </a:r>
-            <a:endParaRPr lang="en-US" dirty="0"/>
+              <a:rPr sz="4200"/>
+              <a:t>TWO ERAS</a:t>
+            </a:r>
+          </a:p>
+          <a:p>
+            <a:r>
+              <a:rPr sz="4200"/>
+              <a:t>Era 1: AI Learns from Humans — IRR establishes ground truth, AI replicates what humans agreed on, scales human judgment.</a:t>
+            </a:r>
+          </a:p>
+          <a:p>
+            <a:r>
+              <a:rPr sz="4200"/>
+              <a:t>Era 2: AI Discovers New Patterns — Ground truth database accumulates, AI finds correlations humans couldn't see, new hypotheses for humans to test.</a:t>
+            </a:r>
+          </a:p>
+          <a:p>
+            <a:r>
+              <a:rPr sz="4200"/>
+              <a:t>"We're building Era 1. Era 2 follows."</a:t>
+            </a:r>
           </a:p>
         </p:txBody>
       </p:sp>
@@ -1225,10 +1387,47 @@
           <a:lstStyle/>
           <a:p>
             <a:r>
-              <a:rPr lang="en-US" dirty="0"/>
-              <a:t/>
-            </a:r>
-            <a:endParaRPr lang="en-US" dirty="0"/>
+              <a:rPr sz="4200"/>
+              <a:t>IF THIS WORKS</a:t>
+            </a:r>
+          </a:p>
+          <a:p>
+            <a:r>
+              <a:rPr sz="4200"/>
+              <a:t>- Certification: Objective competency testing—compare trainee coding to ground truth</a:t>
+            </a:r>
+          </a:p>
+          <a:p>
+            <a:r>
+              <a:rPr sz="4200"/>
+              <a:t>- Standardized training: Measurable outcomes, curriculum based on validated method</a:t>
+            </a:r>
+          </a:p>
+          <a:p>
+            <a:r>
+              <a:rPr sz="4200"/>
+              <a:t>- Aggregate research: Data across practitioners, statistical patterns emerge</a:t>
+            </a:r>
+          </a:p>
+          <a:p>
+            <a:r>
+              <a:rPr sz="4200"/>
+              <a:t>- Tooling: Vertically integrated pro/personal app ecosystem, novel clinical model</a:t>
+            </a:r>
+          </a:p>
+          <a:p/>
+          <a:p>
+            <a:r>
+              <a:rPr sz="4200"/>
+              <a:t>WHY IT SCALES (VERTICAL ALIGNMENT): One simple coding form gives you everything. Design the data model right, and everything else falls into place.</a:t>
+            </a:r>
+          </a:p>
+          <a:p/>
+          <a:p>
+            <a:r>
+              <a:rPr sz="4200"/>
+              <a:t>GETTING INVOLVED: "More on this at day's end." This needs people: clinicians testing the model, researchers contributing cases, developers building tools.</a:t>
+            </a:r>
           </a:p>
         </p:txBody>
       </p:sp>
@@ -1313,10 +1512,9 @@
           <a:lstStyle/>
           <a:p>
             <a:r>
-              <a:rPr lang="en-US" dirty="0"/>
-              <a:t/>
-            </a:r>
-            <a:endParaRPr lang="en-US" dirty="0"/>
+              <a:rPr sz="4200"/>
+              <a:t>SECTION VI: HONEST STATE + CLOSE (5 min)</a:t>
+            </a:r>
           </a:p>
         </p:txBody>
       </p:sp>
@@ -1401,10 +1599,57 @@
           <a:lstStyle/>
           <a:p>
             <a:r>
-              <a:rPr lang="en-US" dirty="0"/>
-              <a:t/>
-            </a:r>
-            <a:endParaRPr lang="en-US" dirty="0"/>
+              <a:rPr sz="4200"/>
+              <a:t>WHERE WE ARE</a:t>
+            </a:r>
+          </a:p>
+          <a:p>
+            <a:r>
+              <a:rPr sz="4200"/>
+              <a:t>Early stage. Showing the process.</a:t>
+            </a:r>
+          </a:p>
+          <a:p>
+            <a:r>
+              <a:rPr sz="4200"/>
+              <a:t>- Pro App: Released — timeline + diagram</a:t>
+            </a:r>
+          </a:p>
+          <a:p>
+            <a:r>
+              <a:rPr sz="4200"/>
+              <a:t>- Personal App: In development — structured intake</a:t>
+            </a:r>
+          </a:p>
+          <a:p>
+            <a:r>
+              <a:rPr sz="4200"/>
+              <a:t>- IRR System: In use — research infrastructure</a:t>
+            </a:r>
+          </a:p>
+          <a:p>
+            <a:r>
+              <a:rPr sz="4200"/>
+              <a:t>- First IRR meeting: next week</a:t>
+            </a:r>
+          </a:p>
+          <a:p>
+            <a:r>
+              <a:rPr sz="4200"/>
+              <a:t>- Synthetic data: working</a:t>
+            </a:r>
+          </a:p>
+          <a:p>
+            <a:r>
+              <a:rPr sz="4200"/>
+              <a:t>- Real recordings: exploring</a:t>
+            </a:r>
+          </a:p>
+          <a:p>
+            <a:r>
+              <a:rPr sz="4200"/>
+              <a:t>"This is what real R&amp;D looks like."</a:t>
+            </a:r>
           </a:p>
         </p:txBody>
       </p:sp>
@@ -1489,10 +1734,9 @@
           <a:lstStyle/>
           <a:p>
             <a:r>
-              <a:rPr lang="en-US" dirty="0"/>
-              <a:t/>
-            </a:r>
-            <a:endParaRPr lang="en-US" dirty="0"/>
+              <a:rPr sz="4200"/>
+              <a:t>SECTION I: CONNECTING TO THIS MORNING (5 min)</a:t>
+            </a:r>
           </a:p>
         </p:txBody>
       </p:sp>
@@ -1577,10 +1821,64 @@
           <a:lstStyle/>
           <a:p>
             <a:r>
-              <a:rPr lang="en-US" dirty="0"/>
-              <a:t/>
-            </a:r>
-            <a:endParaRPr lang="en-US" dirty="0"/>
+              <a:rPr sz="4200"/>
+              <a:t>THE HUMAN REMAINS CENTRAL</a:t>
+            </a:r>
+          </a:p>
+          <a:p>
+            <a:r>
+              <a:rPr sz="4200"/>
+              <a:t>- Ground truth is set by domain experts</a:t>
+            </a:r>
+          </a:p>
+          <a:p>
+            <a:r>
+              <a:rPr sz="4200"/>
+              <a:t>- Software replicates human judgment</a:t>
+            </a:r>
+          </a:p>
+          <a:p>
+            <a:r>
+              <a:rPr sz="4200"/>
+              <a:t>- Every output reviewable and correctable</a:t>
+            </a:r>
+          </a:p>
+          <a:p>
+            <a:r>
+              <a:rPr sz="4200"/>
+              <a:t>"Technology scales. Humans validate."</a:t>
+            </a:r>
+          </a:p>
+          <a:p/>
+          <a:p>
+            <a:r>
+              <a:rPr sz="4200"/>
+              <a:t>KEY LINES FOR THE DAY:</a:t>
+            </a:r>
+          </a:p>
+          <a:p>
+            <a:r>
+              <a:rPr sz="4200"/>
+              <a:t>"Without measurement, we can't tell when we're making it worse."</a:t>
+            </a:r>
+          </a:p>
+          <a:p>
+            <a:r>
+              <a:rPr sz="4200"/>
+              <a:t>"All AI needs is IRR."</a:t>
+            </a:r>
+          </a:p>
+          <a:p>
+            <a:r>
+              <a:rPr sz="4200"/>
+              <a:t>"The machines don't decide what's correct. Humans do."</a:t>
+            </a:r>
+          </a:p>
+          <a:p>
+            <a:r>
+              <a:rPr sz="4200"/>
+              <a:t>"Design the data model right, and everything else falls into place."</a:t>
+            </a:r>
           </a:p>
         </p:txBody>
       </p:sp>
@@ -1665,10 +1963,46 @@
           <a:lstStyle/>
           <a:p>
             <a:r>
-              <a:rPr lang="en-US" dirty="0"/>
-              <a:t/>
-            </a:r>
-            <a:endParaRPr lang="en-US" dirty="0"/>
+              <a:rPr sz="4200"/>
+              <a:t>CLOSING</a:t>
+            </a:r>
+          </a:p>
+          <a:p>
+            <a:r>
+              <a:rPr sz="4200"/>
+              <a:t>alaskafamilysystems.com</a:t>
+            </a:r>
+          </a:p>
+          <a:p>
+            <a:r>
+              <a:rPr sz="4200"/>
+              <a:t>This needs people: clinicians testing the model, researchers contributing cases, developers building tools.</a:t>
+            </a:r>
+          </a:p>
+          <a:p/>
+          <a:p>
+            <a:r>
+              <a:rPr sz="4200"/>
+              <a:t>RISKS TO WATCH:</a:t>
+            </a:r>
+          </a:p>
+          <a:p>
+            <a:r>
+              <a:rPr sz="4200"/>
+              <a:t>- Redundancy with Pres 5: this version is institutional outcomes; Pres 5 centers on the experience of thinking differently</a:t>
+            </a:r>
+          </a:p>
+          <a:p>
+            <a:r>
+              <a:rPr sz="4200"/>
+              <a:t>- Too technical: keep low resolution, use analogies, leave room for questions</a:t>
+            </a:r>
+          </a:p>
+          <a:p>
+            <a:r>
+              <a:rPr sz="4200"/>
+              <a:t>- Pitch-y on tools: keep tools secondary to the research story</a:t>
+            </a:r>
           </a:p>
         </p:txBody>
       </p:sp>
@@ -1753,10 +2087,51 @@
           <a:lstStyle/>
           <a:p>
             <a:r>
-              <a:rPr lang="en-US" dirty="0"/>
-              <a:t/>
-            </a:r>
-            <a:endParaRPr lang="en-US" dirty="0"/>
+              <a:rPr sz="4200"/>
+              <a:t>WITHOUT MEASUREMENT, WE CAN'T TELL WHEN WE'RE MAKING IT WORSE.</a:t>
+            </a:r>
+          </a:p>
+          <a:p>
+            <a:r>
+              <a:rPr sz="4200"/>
+              <a:t>This morning we saw:</a:t>
+            </a:r>
+          </a:p>
+          <a:p>
+            <a:r>
+              <a:rPr sz="4200"/>
+              <a:t>- Practices that harmed the people they intended to help</a:t>
+            </a:r>
+          </a:p>
+          <a:p>
+            <a:r>
+              <a:rPr sz="4200"/>
+              <a:t>- Professions swept up in beliefs that destroyed lives</a:t>
+            </a:r>
+          </a:p>
+          <a:p>
+            <a:r>
+              <a:rPr sz="4200"/>
+              <a:t>- No one asked: "What if this is making things worse?"</a:t>
+            </a:r>
+          </a:p>
+          <a:p>
+            <a:r>
+              <a:rPr sz="4200"/>
+              <a:t>Cambridge-Somerville: Caring intervention. Treatment group had more crime, more addiction, earlier death.</a:t>
+            </a:r>
+          </a:p>
+          <a:p>
+            <a:r>
+              <a:rPr sz="4200"/>
+              <a:t>"How would we know?"</a:t>
+            </a:r>
+          </a:p>
+          <a:p>
+            <a:r>
+              <a:rPr sz="4200"/>
+              <a:t>This presentation is the answer to that question.</a:t>
+            </a:r>
           </a:p>
         </p:txBody>
       </p:sp>
@@ -1841,10 +2216,9 @@
           <a:lstStyle/>
           <a:p>
             <a:r>
-              <a:rPr lang="en-US" dirty="0"/>
-              <a:t/>
-            </a:r>
-            <a:endParaRPr lang="en-US" dirty="0"/>
+              <a:rPr sz="4200"/>
+              <a:t>SECTION II: THE SCALING PROBLEM (10 min)</a:t>
+            </a:r>
           </a:p>
         </p:txBody>
       </p:sp>
@@ -1929,10 +2303,34 @@
           <a:lstStyle/>
           <a:p>
             <a:r>
-              <a:rPr lang="en-US" dirty="0"/>
-              <a:t/>
-            </a:r>
-            <a:endParaRPr lang="en-US" dirty="0"/>
+              <a:rPr sz="4200"/>
+              <a:t>BIG DATA VS. SMALL DATA</a:t>
+            </a:r>
+          </a:p>
+          <a:p>
+            <a:r>
+              <a:rPr sz="4200"/>
+              <a:t>Big Data: Millions of records, simple variables, machine-readable (insurance claims, lab results).</a:t>
+            </a:r>
+          </a:p>
+          <a:p>
+            <a:r>
+              <a:rPr sz="4200"/>
+              <a:t>Small Data: Rich qualitative information, requires interpretation, requires intelligent inference (clinical interviews, family history).</a:t>
+            </a:r>
+          </a:p>
+          <a:p>
+            <a:r>
+              <a:rPr sz="4200"/>
+              <a:t>Our problem is small data.</a:t>
+            </a:r>
+          </a:p>
+          <a:p/>
+          <a:p>
+            <a:r>
+              <a:rPr sz="4200"/>
+              <a:t>THE CODING PROBLEM: To test SARF, someone has to code cases—read/listen to clinical interviews, identify shifts in S, A, R, F, record them on a timeline. Previously: humans doing this tediously, by hand.</a:t>
+            </a:r>
           </a:p>
         </p:txBody>
       </p:sp>
@@ -2017,10 +2415,39 @@
           <a:lstStyle/>
           <a:p>
             <a:r>
-              <a:rPr lang="en-US" dirty="0"/>
-              <a:t/>
-            </a:r>
-            <a:endParaRPr lang="en-US" dirty="0"/>
+              <a:rPr sz="4200"/>
+              <a:t>WHY THIS RESEARCH NEVER HAPPENED</a:t>
+            </a:r>
+          </a:p>
+          <a:p>
+            <a:r>
+              <a:rPr sz="4200"/>
+              <a:t>- Hypothetical model with simple but deep concepts</a:t>
+            </a:r>
+          </a:p>
+          <a:p>
+            <a:r>
+              <a:rPr sz="4200"/>
+              <a:t>- Requires skilled human coders</a:t>
+            </a:r>
+          </a:p>
+          <a:p>
+            <a:r>
+              <a:rPr sz="4200"/>
+              <a:t>- Coding doesn't scale</a:t>
+            </a:r>
+          </a:p>
+          <a:p>
+            <a:r>
+              <a:rPr sz="4200"/>
+              <a:t>- Can't get funding or momentum unless it's someone's day job</a:t>
+            </a:r>
+          </a:p>
+          <a:p>
+            <a:r>
+              <a:rPr sz="4200"/>
+              <a:t>The bottleneck was human coding capacity.</a:t>
+            </a:r>
           </a:p>
         </p:txBody>
       </p:sp>
@@ -2105,10 +2532,39 @@
           <a:lstStyle/>
           <a:p>
             <a:r>
-              <a:rPr lang="en-US" dirty="0"/>
-              <a:t/>
-            </a:r>
-            <a:endParaRPr lang="en-US" dirty="0"/>
+              <a:rPr sz="4200"/>
+              <a:t>WHAT CHANGED</a:t>
+            </a:r>
+          </a:p>
+          <a:p>
+            <a:r>
+              <a:rPr sz="4200"/>
+              <a:t>Machine automation now makes intelligent inference possible at scale.</a:t>
+            </a:r>
+          </a:p>
+          <a:p>
+            <a:r>
+              <a:rPr sz="4200"/>
+              <a:t>- Generate synthetic clinical discussions for training</a:t>
+            </a:r>
+          </a:p>
+          <a:p>
+            <a:r>
+              <a:rPr sz="4200"/>
+              <a:t>- Test automated coding against human judgment</a:t>
+            </a:r>
+          </a:p>
+          <a:p>
+            <a:r>
+              <a:rPr sz="4200"/>
+              <a:t>- Iterate faster than ever before</a:t>
+            </a:r>
+          </a:p>
+          <a:p>
+            <a:r>
+              <a:rPr sz="4200"/>
+              <a:t>"We built this."</a:t>
+            </a:r>
           </a:p>
         </p:txBody>
       </p:sp>
@@ -2193,10 +2649,9 @@
           <a:lstStyle/>
           <a:p>
             <a:r>
-              <a:rPr lang="en-US" dirty="0"/>
-              <a:t/>
-            </a:r>
-            <a:endParaRPr lang="en-US" dirty="0"/>
+              <a:rPr sz="4200"/>
+              <a:t>SECTION III: DOMAIN-EXPERT GROUND TRUTH (10 min)</a:t>
+            </a:r>
           </a:p>
         </p:txBody>
       </p:sp>
@@ -2281,10 +2736,52 @@
           <a:lstStyle/>
           <a:p>
             <a:r>
-              <a:rPr lang="en-US" dirty="0"/>
-              <a:t/>
-            </a:r>
-            <a:endParaRPr lang="en-US" dirty="0"/>
+              <a:rPr sz="4200"/>
+              <a:t>GROUND TRUTH = WHAT THE DOMAIN EXPERTS AGREED ON</a:t>
+            </a:r>
+          </a:p>
+          <a:p>
+            <a:r>
+              <a:rPr sz="4200"/>
+              <a:t>1. Train human experts on SARF</a:t>
+            </a:r>
+          </a:p>
+          <a:p>
+            <a:r>
+              <a:rPr sz="4200"/>
+              <a:t>2. Have them code cases independently (blind)</a:t>
+            </a:r>
+          </a:p>
+          <a:p>
+            <a:r>
+              <a:rPr sz="4200"/>
+              <a:t>3. Measure agreement (Inter-Rater Reliability)</a:t>
+            </a:r>
+          </a:p>
+          <a:p>
+            <a:r>
+              <a:rPr sz="4200"/>
+              <a:t>4. Cases where they agree = ground truth</a:t>
+            </a:r>
+          </a:p>
+          <a:p>
+            <a:r>
+              <a:rPr sz="4200"/>
+              <a:t>"The humans set the standard."</a:t>
+            </a:r>
+          </a:p>
+          <a:p/>
+          <a:p>
+            <a:r>
+              <a:rPr sz="4200"/>
+              <a:t>WHY GROUND TRUTH MATTERS: The machines don't decide what's correct. Humans do. Software learns to replicate human expert judgment. Every output can be reviewed and corrected. Domain experts remain the authority.</a:t>
+            </a:r>
+          </a:p>
+          <a:p>
+            <a:r>
+              <a:rPr sz="4200"/>
+              <a:t>"Ground truth is human truth."</a:t>
+            </a:r>
           </a:p>
         </p:txBody>
       </p:sp>

--- a/3-CLINICAL_RESEARCH/3-Clinical-Research-Cutting-Edge.pptx
+++ b/3-CLINICAL_RESEARCH/3-Clinical-Research-Cutting-Edge.pptx
@@ -12,15 +12,19 @@
     <p:sldId id="260" r:id="rId6"/>
     <p:sldId id="261" r:id="rId7"/>
     <p:sldId id="262" r:id="rId8"/>
+    <p:sldId id="277" r:id="rId28"/>
     <p:sldId id="263" r:id="rId9"/>
     <p:sldId id="264" r:id="rId10"/>
     <p:sldId id="265" r:id="rId11"/>
+    <p:sldId id="278" r:id="rId29"/>
     <p:sldId id="266" r:id="rId12"/>
     <p:sldId id="267" r:id="rId13"/>
+    <p:sldId id="279" r:id="rId30"/>
     <p:sldId id="268" r:id="rId14"/>
     <p:sldId id="269" r:id="rId15"/>
     <p:sldId id="270" r:id="rId16"/>
     <p:sldId id="271" r:id="rId17"/>
+    <p:sldId id="280" r:id="rId31"/>
     <p:sldId id="272" r:id="rId18"/>
     <p:sldId id="273" r:id="rId19"/>
     <p:sldId id="274" r:id="rId20"/>
@@ -2035,6 +2039,346 @@
         <p14:creationId xmlns:p14="http://schemas.microsoft.com/office/powerpoint/2010/main" val="1024086991"/>
       </p:ext>
     </p:extLst>
+  </p:cSld>
+  <p:clrMapOvr>
+    <a:masterClrMapping/>
+  </p:clrMapOvr>
+</p:notes>
+</file>
+
+<file path=ppt/notesSlides/notesSlide22.xml><?xml version="1.0" encoding="utf-8"?>
+<p:notes xmlns:a="http://schemas.openxmlformats.org/drawingml/2006/main" xmlns:p="http://schemas.openxmlformats.org/presentationml/2006/main" xmlns:r="http://schemas.openxmlformats.org/officeDocument/2006/relationships">
+  <p:cSld>
+    <p:spTree>
+      <p:nvGrpSpPr>
+        <p:cNvPr id="1" name=""/>
+        <p:cNvGrpSpPr/>
+        <p:nvPr/>
+      </p:nvGrpSpPr>
+      <p:grpSpPr>
+        <a:xfrm>
+          <a:off x="0" y="0"/>
+          <a:ext cx="0" cy="0"/>
+          <a:chOff x="0" y="0"/>
+          <a:chExt cx="0" cy="0"/>
+        </a:xfrm>
+      </p:grpSpPr>
+      <p:sp>
+        <p:nvSpPr>
+          <p:cNvPr id="2" name="Slide Image Placeholder 1"/>
+          <p:cNvSpPr>
+            <a:spLocks noGrp="1"/>
+          </p:cNvSpPr>
+          <p:nvPr>
+            <p:ph type="sldImg" idx="2"/>
+          </p:nvPr>
+        </p:nvSpPr>
+        <p:spPr/>
+      </p:sp>
+      <p:sp>
+        <p:nvSpPr>
+          <p:cNvPr id="3" name="Notes Placeholder 2"/>
+          <p:cNvSpPr>
+            <a:spLocks noGrp="1"/>
+          </p:cNvSpPr>
+          <p:nvPr>
+            <p:ph type="body" idx="3" sz="quarter"/>
+          </p:nvPr>
+        </p:nvSpPr>
+        <p:spPr/>
+        <p:txBody>
+          <a:bodyPr/>
+          <a:lstStyle/>
+          <a:p>
+            <a:r>
+              <a:rPr sz="4200"/>
+              <a:t>SARF EDITOR</a:t>
+            </a:r>
+          </a:p>
+          <a:p/>
+          <a:p>
+            <a:r>
+              <a:rPr sz="4200"/>
+              <a:t>Screenshot of the SARF coding editor interface. This is the tool used to code cases — identify shifts in S, A, R, F and record them on a timeline.</a:t>
+            </a:r>
+          </a:p>
+          <a:p/>
+          <a:p>
+            <a:r>
+              <a:rPr sz="4200"/>
+              <a:t>This is what made the research possible. Machine automation now makes intelligent inference possible at scale.</a:t>
+            </a:r>
+          </a:p>
+        </p:txBody>
+      </p:sp>
+      <p:sp>
+        <p:nvSpPr>
+          <p:cNvPr id="4" name="Slide Number Placeholder 3"/>
+          <p:cNvSpPr>
+            <a:spLocks noGrp="1"/>
+          </p:cNvSpPr>
+          <p:nvPr>
+            <p:ph type="sldNum" idx="5" sz="quarter"/>
+          </p:nvPr>
+        </p:nvSpPr>
+        <p:spPr/>
+      </p:sp>
+    </p:spTree>
+  </p:cSld>
+  <p:clrMapOvr>
+    <a:masterClrMapping/>
+  </p:clrMapOvr>
+</p:notes>
+</file>
+
+<file path=ppt/notesSlides/notesSlide23.xml><?xml version="1.0" encoding="utf-8"?>
+<p:notes xmlns:a="http://schemas.openxmlformats.org/drawingml/2006/main" xmlns:p="http://schemas.openxmlformats.org/presentationml/2006/main" xmlns:r="http://schemas.openxmlformats.org/officeDocument/2006/relationships">
+  <p:cSld>
+    <p:spTree>
+      <p:nvGrpSpPr>
+        <p:cNvPr id="1" name=""/>
+        <p:cNvGrpSpPr/>
+        <p:nvPr/>
+      </p:nvGrpSpPr>
+      <p:grpSpPr>
+        <a:xfrm>
+          <a:off x="0" y="0"/>
+          <a:ext cx="0" cy="0"/>
+          <a:chOff x="0" y="0"/>
+          <a:chExt cx="0" cy="0"/>
+        </a:xfrm>
+      </p:grpSpPr>
+      <p:sp>
+        <p:nvSpPr>
+          <p:cNvPr id="2" name="Slide Image Placeholder 1"/>
+          <p:cNvSpPr>
+            <a:spLocks noGrp="1"/>
+          </p:cNvSpPr>
+          <p:nvPr>
+            <p:ph type="sldImg" idx="2"/>
+          </p:nvPr>
+        </p:nvSpPr>
+        <p:spPr/>
+      </p:sp>
+      <p:sp>
+        <p:nvSpPr>
+          <p:cNvPr id="3" name="Notes Placeholder 2"/>
+          <p:cNvSpPr>
+            <a:spLocks noGrp="1"/>
+          </p:cNvSpPr>
+          <p:nvPr>
+            <p:ph type="body" idx="3" sz="quarter"/>
+          </p:nvPr>
+        </p:nvSpPr>
+        <p:spPr/>
+        <p:txBody>
+          <a:bodyPr/>
+          <a:lstStyle/>
+          <a:p>
+            <a:r>
+              <a:rPr sz="4200"/>
+              <a:t>IRR REVIEW</a:t>
+            </a:r>
+          </a:p>
+          <a:p/>
+          <a:p>
+            <a:r>
+              <a:rPr sz="4200"/>
+              <a:t>Screenshot of the Inter-Rater Reliability review interface. This is where human expert codings are compared — measuring agreement between independent coders.</a:t>
+            </a:r>
+          </a:p>
+          <a:p/>
+          <a:p>
+            <a:r>
+              <a:rPr sz="4200"/>
+              <a:t>Cases where experts agree become ground truth. The humans set the standard.</a:t>
+            </a:r>
+          </a:p>
+        </p:txBody>
+      </p:sp>
+      <p:sp>
+        <p:nvSpPr>
+          <p:cNvPr id="4" name="Slide Number Placeholder 3"/>
+          <p:cNvSpPr>
+            <a:spLocks noGrp="1"/>
+          </p:cNvSpPr>
+          <p:nvPr>
+            <p:ph type="sldNum" idx="5" sz="quarter"/>
+          </p:nvPr>
+        </p:nvSpPr>
+        <p:spPr/>
+      </p:sp>
+    </p:spTree>
+  </p:cSld>
+  <p:clrMapOvr>
+    <a:masterClrMapping/>
+  </p:clrMapOvr>
+</p:notes>
+</file>
+
+<file path=ppt/notesSlides/notesSlide24.xml><?xml version="1.0" encoding="utf-8"?>
+<p:notes xmlns:a="http://schemas.openxmlformats.org/drawingml/2006/main" xmlns:p="http://schemas.openxmlformats.org/presentationml/2006/main" xmlns:r="http://schemas.openxmlformats.org/officeDocument/2006/relationships">
+  <p:cSld>
+    <p:spTree>
+      <p:nvGrpSpPr>
+        <p:cNvPr id="1" name=""/>
+        <p:cNvGrpSpPr/>
+        <p:nvPr/>
+      </p:nvGrpSpPr>
+      <p:grpSpPr>
+        <a:xfrm>
+          <a:off x="0" y="0"/>
+          <a:ext cx="0" cy="0"/>
+          <a:chOff x="0" y="0"/>
+          <a:chExt cx="0" cy="0"/>
+        </a:xfrm>
+      </p:grpSpPr>
+      <p:sp>
+        <p:nvSpPr>
+          <p:cNvPr id="2" name="Slide Image Placeholder 1"/>
+          <p:cNvSpPr>
+            <a:spLocks noGrp="1"/>
+          </p:cNvSpPr>
+          <p:nvPr>
+            <p:ph type="sldImg" idx="2"/>
+          </p:nvPr>
+        </p:nvSpPr>
+        <p:spPr/>
+      </p:sp>
+      <p:sp>
+        <p:nvSpPr>
+          <p:cNvPr id="3" name="Notes Placeholder 2"/>
+          <p:cNvSpPr>
+            <a:spLocks noGrp="1"/>
+          </p:cNvSpPr>
+          <p:nvPr>
+            <p:ph type="body" idx="3" sz="quarter"/>
+          </p:nvPr>
+        </p:nvSpPr>
+        <p:spPr/>
+        <p:txBody>
+          <a:bodyPr/>
+          <a:lstStyle/>
+          <a:p>
+            <a:r>
+              <a:rPr sz="4200"/>
+              <a:t>SYNTHETIC DATA</a:t>
+            </a:r>
+          </a:p>
+          <a:p/>
+          <a:p>
+            <a:r>
+              <a:rPr sz="4200"/>
+              <a:t>Screenshot of the synthetic clinical discussion generator. Synthetic data accelerates training — cleaner examples with known ground truth, faster iteration cycles.</a:t>
+            </a:r>
+          </a:p>
+          <a:p/>
+          <a:p>
+            <a:r>
+              <a:rPr sz="4200"/>
+              <a:t>Real recordings are the goal. Synthetic data accelerates getting there.</a:t>
+            </a:r>
+          </a:p>
+        </p:txBody>
+      </p:sp>
+      <p:sp>
+        <p:nvSpPr>
+          <p:cNvPr id="4" name="Slide Number Placeholder 3"/>
+          <p:cNvSpPr>
+            <a:spLocks noGrp="1"/>
+          </p:cNvSpPr>
+          <p:nvPr>
+            <p:ph type="sldNum" idx="5" sz="quarter"/>
+          </p:nvPr>
+        </p:nvSpPr>
+        <p:spPr/>
+      </p:sp>
+    </p:spTree>
+  </p:cSld>
+  <p:clrMapOvr>
+    <a:masterClrMapping/>
+  </p:clrMapOvr>
+</p:notes>
+</file>
+
+<file path=ppt/notesSlides/notesSlide25.xml><?xml version="1.0" encoding="utf-8"?>
+<p:notes xmlns:a="http://schemas.openxmlformats.org/drawingml/2006/main" xmlns:p="http://schemas.openxmlformats.org/presentationml/2006/main" xmlns:r="http://schemas.openxmlformats.org/officeDocument/2006/relationships">
+  <p:cSld>
+    <p:spTree>
+      <p:nvGrpSpPr>
+        <p:cNvPr id="1" name=""/>
+        <p:cNvGrpSpPr/>
+        <p:nvPr/>
+      </p:nvGrpSpPr>
+      <p:grpSpPr>
+        <a:xfrm>
+          <a:off x="0" y="0"/>
+          <a:ext cx="0" cy="0"/>
+          <a:chOff x="0" y="0"/>
+          <a:chExt cx="0" cy="0"/>
+        </a:xfrm>
+      </p:grpSpPr>
+      <p:sp>
+        <p:nvSpPr>
+          <p:cNvPr id="2" name="Slide Image Placeholder 1"/>
+          <p:cNvSpPr>
+            <a:spLocks noGrp="1"/>
+          </p:cNvSpPr>
+          <p:nvPr>
+            <p:ph type="sldImg" idx="2"/>
+          </p:nvPr>
+        </p:nvSpPr>
+        <p:spPr/>
+      </p:sp>
+      <p:sp>
+        <p:nvSpPr>
+          <p:cNvPr id="3" name="Notes Placeholder 2"/>
+          <p:cNvSpPr>
+            <a:spLocks noGrp="1"/>
+          </p:cNvSpPr>
+          <p:nvPr>
+            <p:ph type="body" idx="3" sz="quarter"/>
+          </p:nvPr>
+        </p:nvSpPr>
+        <p:spPr/>
+        <p:txBody>
+          <a:bodyPr/>
+          <a:lstStyle/>
+          <a:p>
+            <a:r>
+              <a:rPr sz="4200"/>
+              <a:t>PRO APP — ADD DATA</a:t>
+            </a:r>
+          </a:p>
+          <a:p/>
+          <a:p>
+            <a:r>
+              <a:rPr sz="4200"/>
+              <a:t>Screenshot of the Pro app's data entry form. This is what clinicians use to code cases — the single coding form that feeds everything downstream.</a:t>
+            </a:r>
+          </a:p>
+          <a:p/>
+          <a:p>
+            <a:r>
+              <a:rPr sz="4200"/>
+              <a:t>Design the data model right, and everything else falls into place.</a:t>
+            </a:r>
+          </a:p>
+        </p:txBody>
+      </p:sp>
+      <p:sp>
+        <p:nvSpPr>
+          <p:cNvPr id="4" name="Slide Number Placeholder 3"/>
+          <p:cNvSpPr>
+            <a:spLocks noGrp="1"/>
+          </p:cNvSpPr>
+          <p:nvPr>
+            <p:ph type="sldNum" idx="5" sz="quarter"/>
+          </p:nvPr>
+        </p:nvSpPr>
+        <p:spPr/>
+      </p:sp>
+    </p:spTree>
   </p:cSld>
   <p:clrMapOvr>
     <a:masterClrMapping/>
@@ -3393,6 +3737,772 @@
 </file>
 
 <file path=ppt/slides/slide10.xml><?xml version="1.0" encoding="utf-8"?>
+<p:sld xmlns:a="http://schemas.openxmlformats.org/drawingml/2006/main" xmlns:r="http://schemas.openxmlformats.org/officeDocument/2006/relationships" xmlns:p="http://schemas.openxmlformats.org/presentationml/2006/main">
+  <p:cSld name="Slide 9">
+    <p:bg>
+      <p:bgPr>
+        <a:solidFill>
+          <a:srgbClr val="F0F4F8"/>
+        </a:solidFill>
+      </p:bgPr>
+    </p:bg>
+    <p:spTree>
+      <p:nvGrpSpPr>
+        <p:cNvPr id="1" name=""/>
+        <p:cNvGrpSpPr/>
+        <p:nvPr/>
+      </p:nvGrpSpPr>
+      <p:grpSpPr>
+        <a:xfrm>
+          <a:off x="0" y="0"/>
+          <a:ext cx="0" cy="0"/>
+          <a:chOff x="0" y="0"/>
+          <a:chExt cx="0" cy="0"/>
+        </a:xfrm>
+      </p:grpSpPr>
+      <p:sp>
+        <p:nvSpPr>
+          <p:cNvPr id="2" name="Text 0"/>
+          <p:cNvSpPr/>
+          <p:nvPr/>
+        </p:nvSpPr>
+        <p:spPr>
+          <a:xfrm>
+            <a:off x="731520" y="365760"/>
+            <a:ext cx="7680960" cy="640080"/>
+          </a:xfrm>
+          <a:prstGeom prst="rect">
+            <a:avLst/>
+          </a:prstGeom>
+          <a:noFill/>
+          <a:ln/>
+        </p:spPr>
+        <p:txBody>
+          <a:bodyPr wrap="square" lIns="0" tIns="0" rIns="0" bIns="0" rtlCol="0" anchor="ctr"/>
+          <a:lstStyle/>
+          <a:p>
+            <a:pPr indent="0" marL="0">
+              <a:buNone/>
+            </a:pPr>
+            <a:r>
+              <a:rPr lang="en-US" sz="2600" b="1" dirty="0">
+                <a:solidFill>
+                  <a:srgbClr val="1E293B"/>
+                </a:solidFill>
+                <a:latin typeface="Georgia" pitchFamily="34" charset="0"/>
+                <a:ea typeface="Georgia" pitchFamily="34" charset="-122"/>
+                <a:cs typeface="Georgia" pitchFamily="34" charset="-120"/>
+              </a:rPr>
+              <a:t>Ground Truth = What the Experts Agreed On</a:t>
+            </a:r>
+            <a:endParaRPr lang="en-US" sz="2600" dirty="0"/>
+          </a:p>
+        </p:txBody>
+      </p:sp>
+      <p:sp>
+        <p:nvSpPr>
+          <p:cNvPr id="3" name="Shape 1"/>
+          <p:cNvSpPr/>
+          <p:nvPr/>
+        </p:nvSpPr>
+        <p:spPr>
+          <a:xfrm>
+            <a:off x="731520" y="1280160"/>
+            <a:ext cx="3657600" cy="1234440"/>
+          </a:xfrm>
+          <a:prstGeom prst="rect">
+            <a:avLst/>
+          </a:prstGeom>
+          <a:solidFill>
+            <a:srgbClr val="FFFFFF"/>
+          </a:solidFill>
+          <a:ln/>
+          <a:effectLst>
+            <a:outerShdw sx="100000" sy="100000" kx="0" ky="0" algn="bl" rotWithShape="0" blurRad="76200" dist="25400" dir="8100000">
+              <a:srgbClr val="000000">
+                <a:alpha val="12000"/>
+              </a:srgbClr>
+            </a:outerShdw>
+          </a:effectLst>
+        </p:spPr>
+      </p:sp>
+      <p:sp>
+        <p:nvSpPr>
+          <p:cNvPr id="4" name="Shape 2"/>
+          <p:cNvSpPr/>
+          <p:nvPr/>
+        </p:nvSpPr>
+        <p:spPr>
+          <a:xfrm>
+            <a:off x="914400" y="1508760"/>
+            <a:ext cx="502920" cy="502920"/>
+          </a:xfrm>
+          <a:prstGeom prst="ellipse">
+            <a:avLst/>
+          </a:prstGeom>
+          <a:solidFill>
+            <a:srgbClr val="0891B2"/>
+          </a:solidFill>
+          <a:ln/>
+        </p:spPr>
+      </p:sp>
+      <p:sp>
+        <p:nvSpPr>
+          <p:cNvPr id="5" name="Text 3"/>
+          <p:cNvSpPr/>
+          <p:nvPr/>
+        </p:nvSpPr>
+        <p:spPr>
+          <a:xfrm>
+            <a:off x="914400" y="1508760"/>
+            <a:ext cx="502920" cy="502920"/>
+          </a:xfrm>
+          <a:prstGeom prst="rect">
+            <a:avLst/>
+          </a:prstGeom>
+          <a:noFill/>
+          <a:ln/>
+        </p:spPr>
+        <p:txBody>
+          <a:bodyPr wrap="square" lIns="0" tIns="0" rIns="0" bIns="0" rtlCol="0" anchor="ctr"/>
+          <a:lstStyle/>
+          <a:p>
+            <a:pPr algn="ctr" indent="0" marL="0">
+              <a:buNone/>
+            </a:pPr>
+            <a:r>
+              <a:rPr lang="en-US" sz="2000" b="1" dirty="0">
+                <a:solidFill>
+                  <a:srgbClr val="FFFFFF"/>
+                </a:solidFill>
+                <a:latin typeface="Calibri" pitchFamily="34" charset="0"/>
+                <a:ea typeface="Calibri" pitchFamily="34" charset="-122"/>
+                <a:cs typeface="Calibri" pitchFamily="34" charset="-120"/>
+              </a:rPr>
+              <a:t>1</a:t>
+            </a:r>
+            <a:endParaRPr lang="en-US" sz="2000" dirty="0"/>
+          </a:p>
+        </p:txBody>
+      </p:sp>
+      <p:sp>
+        <p:nvSpPr>
+          <p:cNvPr id="6" name="Text 4"/>
+          <p:cNvSpPr/>
+          <p:nvPr/>
+        </p:nvSpPr>
+        <p:spPr>
+          <a:xfrm>
+            <a:off x="1600200" y="1463040"/>
+            <a:ext cx="2468880" cy="365760"/>
+          </a:xfrm>
+          <a:prstGeom prst="rect">
+            <a:avLst/>
+          </a:prstGeom>
+          <a:noFill/>
+          <a:ln/>
+        </p:spPr>
+        <p:txBody>
+          <a:bodyPr wrap="square" lIns="0" tIns="0" rIns="0" bIns="0" rtlCol="0" anchor="ctr"/>
+          <a:lstStyle/>
+          <a:p>
+            <a:pPr indent="0" marL="0">
+              <a:buNone/>
+            </a:pPr>
+            <a:r>
+              <a:rPr lang="en-US" sz="1600" b="1" dirty="0">
+                <a:solidFill>
+                  <a:srgbClr val="1E293B"/>
+                </a:solidFill>
+                <a:latin typeface="Calibri" pitchFamily="34" charset="0"/>
+                <a:ea typeface="Calibri" pitchFamily="34" charset="-122"/>
+                <a:cs typeface="Calibri" pitchFamily="34" charset="-120"/>
+              </a:rPr>
+              <a:t>Train</a:t>
+            </a:r>
+            <a:endParaRPr lang="en-US" sz="1600" dirty="0"/>
+          </a:p>
+        </p:txBody>
+      </p:sp>
+      <p:sp>
+        <p:nvSpPr>
+          <p:cNvPr id="7" name="Text 5"/>
+          <p:cNvSpPr/>
+          <p:nvPr/>
+        </p:nvSpPr>
+        <p:spPr>
+          <a:xfrm>
+            <a:off x="1600200" y="1828800"/>
+            <a:ext cx="2468880" cy="457200"/>
+          </a:xfrm>
+          <a:prstGeom prst="rect">
+            <a:avLst/>
+          </a:prstGeom>
+          <a:noFill/>
+          <a:ln/>
+        </p:spPr>
+        <p:txBody>
+          <a:bodyPr wrap="square" lIns="0" tIns="0" rIns="0" bIns="0" rtlCol="0" anchor="ctr"/>
+          <a:lstStyle/>
+          <a:p>
+            <a:pPr indent="0" marL="0">
+              <a:buNone/>
+            </a:pPr>
+            <a:r>
+              <a:rPr lang="en-US" sz="1300" dirty="0">
+                <a:solidFill>
+                  <a:srgbClr val="475569"/>
+                </a:solidFill>
+                <a:latin typeface="Calibri" pitchFamily="34" charset="0"/>
+                <a:ea typeface="Calibri" pitchFamily="34" charset="-122"/>
+                <a:cs typeface="Calibri" pitchFamily="34" charset="-120"/>
+              </a:rPr>
+              <a:t>Human experts learn SARF coding</a:t>
+            </a:r>
+            <a:endParaRPr lang="en-US" sz="1300" dirty="0"/>
+          </a:p>
+        </p:txBody>
+      </p:sp>
+      <p:sp>
+        <p:nvSpPr>
+          <p:cNvPr id="8" name="Shape 6"/>
+          <p:cNvSpPr/>
+          <p:nvPr/>
+        </p:nvSpPr>
+        <p:spPr>
+          <a:xfrm>
+            <a:off x="4754880" y="1280160"/>
+            <a:ext cx="3657600" cy="1234440"/>
+          </a:xfrm>
+          <a:prstGeom prst="rect">
+            <a:avLst/>
+          </a:prstGeom>
+          <a:solidFill>
+            <a:srgbClr val="FFFFFF"/>
+          </a:solidFill>
+          <a:ln/>
+          <a:effectLst>
+            <a:outerShdw sx="100000" sy="100000" kx="0" ky="0" algn="bl" rotWithShape="0" blurRad="76200" dist="25400" dir="8100000">
+              <a:srgbClr val="000000">
+                <a:alpha val="12000"/>
+              </a:srgbClr>
+            </a:outerShdw>
+          </a:effectLst>
+        </p:spPr>
+      </p:sp>
+      <p:sp>
+        <p:nvSpPr>
+          <p:cNvPr id="9" name="Shape 7"/>
+          <p:cNvSpPr/>
+          <p:nvPr/>
+        </p:nvSpPr>
+        <p:spPr>
+          <a:xfrm>
+            <a:off x="4937760" y="1508760"/>
+            <a:ext cx="502920" cy="502920"/>
+          </a:xfrm>
+          <a:prstGeom prst="ellipse">
+            <a:avLst/>
+          </a:prstGeom>
+          <a:solidFill>
+            <a:srgbClr val="0891B2"/>
+          </a:solidFill>
+          <a:ln/>
+        </p:spPr>
+      </p:sp>
+      <p:sp>
+        <p:nvSpPr>
+          <p:cNvPr id="10" name="Text 8"/>
+          <p:cNvSpPr/>
+          <p:nvPr/>
+        </p:nvSpPr>
+        <p:spPr>
+          <a:xfrm>
+            <a:off x="4937760" y="1508760"/>
+            <a:ext cx="502920" cy="502920"/>
+          </a:xfrm>
+          <a:prstGeom prst="rect">
+            <a:avLst/>
+          </a:prstGeom>
+          <a:noFill/>
+          <a:ln/>
+        </p:spPr>
+        <p:txBody>
+          <a:bodyPr wrap="square" lIns="0" tIns="0" rIns="0" bIns="0" rtlCol="0" anchor="ctr"/>
+          <a:lstStyle/>
+          <a:p>
+            <a:pPr algn="ctr" indent="0" marL="0">
+              <a:buNone/>
+            </a:pPr>
+            <a:r>
+              <a:rPr lang="en-US" sz="2000" b="1" dirty="0">
+                <a:solidFill>
+                  <a:srgbClr val="FFFFFF"/>
+                </a:solidFill>
+                <a:latin typeface="Calibri" pitchFamily="34" charset="0"/>
+                <a:ea typeface="Calibri" pitchFamily="34" charset="-122"/>
+                <a:cs typeface="Calibri" pitchFamily="34" charset="-120"/>
+              </a:rPr>
+              <a:t>2</a:t>
+            </a:r>
+            <a:endParaRPr lang="en-US" sz="2000" dirty="0"/>
+          </a:p>
+        </p:txBody>
+      </p:sp>
+      <p:sp>
+        <p:nvSpPr>
+          <p:cNvPr id="11" name="Text 9"/>
+          <p:cNvSpPr/>
+          <p:nvPr/>
+        </p:nvSpPr>
+        <p:spPr>
+          <a:xfrm>
+            <a:off x="5623560" y="1463040"/>
+            <a:ext cx="2468880" cy="365760"/>
+          </a:xfrm>
+          <a:prstGeom prst="rect">
+            <a:avLst/>
+          </a:prstGeom>
+          <a:noFill/>
+          <a:ln/>
+        </p:spPr>
+        <p:txBody>
+          <a:bodyPr wrap="square" lIns="0" tIns="0" rIns="0" bIns="0" rtlCol="0" anchor="ctr"/>
+          <a:lstStyle/>
+          <a:p>
+            <a:pPr indent="0" marL="0">
+              <a:buNone/>
+            </a:pPr>
+            <a:r>
+              <a:rPr lang="en-US" sz="1600" b="1" dirty="0">
+                <a:solidFill>
+                  <a:srgbClr val="1E293B"/>
+                </a:solidFill>
+                <a:latin typeface="Calibri" pitchFamily="34" charset="0"/>
+                <a:ea typeface="Calibri" pitchFamily="34" charset="-122"/>
+                <a:cs typeface="Calibri" pitchFamily="34" charset="-120"/>
+              </a:rPr>
+              <a:t>Code Blindly</a:t>
+            </a:r>
+            <a:endParaRPr lang="en-US" sz="1600" dirty="0"/>
+          </a:p>
+        </p:txBody>
+      </p:sp>
+      <p:sp>
+        <p:nvSpPr>
+          <p:cNvPr id="12" name="Text 10"/>
+          <p:cNvSpPr/>
+          <p:nvPr/>
+        </p:nvSpPr>
+        <p:spPr>
+          <a:xfrm>
+            <a:off x="5623560" y="1828800"/>
+            <a:ext cx="2468880" cy="457200"/>
+          </a:xfrm>
+          <a:prstGeom prst="rect">
+            <a:avLst/>
+          </a:prstGeom>
+          <a:noFill/>
+          <a:ln/>
+        </p:spPr>
+        <p:txBody>
+          <a:bodyPr wrap="square" lIns="0" tIns="0" rIns="0" bIns="0" rtlCol="0" anchor="ctr"/>
+          <a:lstStyle/>
+          <a:p>
+            <a:pPr indent="0" marL="0">
+              <a:buNone/>
+            </a:pPr>
+            <a:r>
+              <a:rPr lang="en-US" sz="1300" dirty="0">
+                <a:solidFill>
+                  <a:srgbClr val="475569"/>
+                </a:solidFill>
+                <a:latin typeface="Calibri" pitchFamily="34" charset="0"/>
+                <a:ea typeface="Calibri" pitchFamily="34" charset="-122"/>
+                <a:cs typeface="Calibri" pitchFamily="34" charset="-120"/>
+              </a:rPr>
+              <a:t>Independent coding of cases</a:t>
+            </a:r>
+            <a:endParaRPr lang="en-US" sz="1300" dirty="0"/>
+          </a:p>
+        </p:txBody>
+      </p:sp>
+      <p:sp>
+        <p:nvSpPr>
+          <p:cNvPr id="13" name="Shape 11"/>
+          <p:cNvSpPr/>
+          <p:nvPr/>
+        </p:nvSpPr>
+        <p:spPr>
+          <a:xfrm>
+            <a:off x="731520" y="2788920"/>
+            <a:ext cx="3657600" cy="1234440"/>
+          </a:xfrm>
+          <a:prstGeom prst="rect">
+            <a:avLst/>
+          </a:prstGeom>
+          <a:solidFill>
+            <a:srgbClr val="FFFFFF"/>
+          </a:solidFill>
+          <a:ln/>
+          <a:effectLst>
+            <a:outerShdw sx="100000" sy="100000" kx="0" ky="0" algn="bl" rotWithShape="0" blurRad="76200" dist="25400" dir="8100000">
+              <a:srgbClr val="000000">
+                <a:alpha val="12000"/>
+              </a:srgbClr>
+            </a:outerShdw>
+          </a:effectLst>
+        </p:spPr>
+      </p:sp>
+      <p:sp>
+        <p:nvSpPr>
+          <p:cNvPr id="14" name="Shape 12"/>
+          <p:cNvSpPr/>
+          <p:nvPr/>
+        </p:nvSpPr>
+        <p:spPr>
+          <a:xfrm>
+            <a:off x="914400" y="3017520"/>
+            <a:ext cx="502920" cy="502920"/>
+          </a:xfrm>
+          <a:prstGeom prst="ellipse">
+            <a:avLst/>
+          </a:prstGeom>
+          <a:solidFill>
+            <a:srgbClr val="0891B2"/>
+          </a:solidFill>
+          <a:ln/>
+        </p:spPr>
+      </p:sp>
+      <p:sp>
+        <p:nvSpPr>
+          <p:cNvPr id="15" name="Text 13"/>
+          <p:cNvSpPr/>
+          <p:nvPr/>
+        </p:nvSpPr>
+        <p:spPr>
+          <a:xfrm>
+            <a:off x="914400" y="3017520"/>
+            <a:ext cx="502920" cy="502920"/>
+          </a:xfrm>
+          <a:prstGeom prst="rect">
+            <a:avLst/>
+          </a:prstGeom>
+          <a:noFill/>
+          <a:ln/>
+        </p:spPr>
+        <p:txBody>
+          <a:bodyPr wrap="square" lIns="0" tIns="0" rIns="0" bIns="0" rtlCol="0" anchor="ctr"/>
+          <a:lstStyle/>
+          <a:p>
+            <a:pPr algn="ctr" indent="0" marL="0">
+              <a:buNone/>
+            </a:pPr>
+            <a:r>
+              <a:rPr lang="en-US" sz="2000" b="1" dirty="0">
+                <a:solidFill>
+                  <a:srgbClr val="FFFFFF"/>
+                </a:solidFill>
+                <a:latin typeface="Calibri" pitchFamily="34" charset="0"/>
+                <a:ea typeface="Calibri" pitchFamily="34" charset="-122"/>
+                <a:cs typeface="Calibri" pitchFamily="34" charset="-120"/>
+              </a:rPr>
+              <a:t>3</a:t>
+            </a:r>
+            <a:endParaRPr lang="en-US" sz="2000" dirty="0"/>
+          </a:p>
+        </p:txBody>
+      </p:sp>
+      <p:sp>
+        <p:nvSpPr>
+          <p:cNvPr id="16" name="Text 14"/>
+          <p:cNvSpPr/>
+          <p:nvPr/>
+        </p:nvSpPr>
+        <p:spPr>
+          <a:xfrm>
+            <a:off x="1600200" y="2971800"/>
+            <a:ext cx="2468880" cy="365760"/>
+          </a:xfrm>
+          <a:prstGeom prst="rect">
+            <a:avLst/>
+          </a:prstGeom>
+          <a:noFill/>
+          <a:ln/>
+        </p:spPr>
+        <p:txBody>
+          <a:bodyPr wrap="square" lIns="0" tIns="0" rIns="0" bIns="0" rtlCol="0" anchor="ctr"/>
+          <a:lstStyle/>
+          <a:p>
+            <a:pPr indent="0" marL="0">
+              <a:buNone/>
+            </a:pPr>
+            <a:r>
+              <a:rPr lang="en-US" sz="1600" b="1" dirty="0">
+                <a:solidFill>
+                  <a:srgbClr val="1E293B"/>
+                </a:solidFill>
+                <a:latin typeface="Calibri" pitchFamily="34" charset="0"/>
+                <a:ea typeface="Calibri" pitchFamily="34" charset="-122"/>
+                <a:cs typeface="Calibri" pitchFamily="34" charset="-120"/>
+              </a:rPr>
+              <a:t>Measure Agreement</a:t>
+            </a:r>
+            <a:endParaRPr lang="en-US" sz="1600" dirty="0"/>
+          </a:p>
+        </p:txBody>
+      </p:sp>
+      <p:sp>
+        <p:nvSpPr>
+          <p:cNvPr id="17" name="Text 15"/>
+          <p:cNvSpPr/>
+          <p:nvPr/>
+        </p:nvSpPr>
+        <p:spPr>
+          <a:xfrm>
+            <a:off x="1600200" y="3337560"/>
+            <a:ext cx="2468880" cy="457200"/>
+          </a:xfrm>
+          <a:prstGeom prst="rect">
+            <a:avLst/>
+          </a:prstGeom>
+          <a:noFill/>
+          <a:ln/>
+        </p:spPr>
+        <p:txBody>
+          <a:bodyPr wrap="square" lIns="0" tIns="0" rIns="0" bIns="0" rtlCol="0" anchor="ctr"/>
+          <a:lstStyle/>
+          <a:p>
+            <a:pPr indent="0" marL="0">
+              <a:buNone/>
+            </a:pPr>
+            <a:r>
+              <a:rPr lang="en-US" sz="1300" dirty="0">
+                <a:solidFill>
+                  <a:srgbClr val="475569"/>
+                </a:solidFill>
+                <a:latin typeface="Calibri" pitchFamily="34" charset="0"/>
+                <a:ea typeface="Calibri" pitchFamily="34" charset="-122"/>
+                <a:cs typeface="Calibri" pitchFamily="34" charset="-120"/>
+              </a:rPr>
+              <a:t>Inter-Rater Reliability (IRR)</a:t>
+            </a:r>
+            <a:endParaRPr lang="en-US" sz="1300" dirty="0"/>
+          </a:p>
+        </p:txBody>
+      </p:sp>
+      <p:sp>
+        <p:nvSpPr>
+          <p:cNvPr id="18" name="Shape 16"/>
+          <p:cNvSpPr/>
+          <p:nvPr/>
+        </p:nvSpPr>
+        <p:spPr>
+          <a:xfrm>
+            <a:off x="4754880" y="2788920"/>
+            <a:ext cx="3657600" cy="1234440"/>
+          </a:xfrm>
+          <a:prstGeom prst="rect">
+            <a:avLst/>
+          </a:prstGeom>
+          <a:solidFill>
+            <a:srgbClr val="FFFFFF"/>
+          </a:solidFill>
+          <a:ln/>
+          <a:effectLst>
+            <a:outerShdw sx="100000" sy="100000" kx="0" ky="0" algn="bl" rotWithShape="0" blurRad="76200" dist="25400" dir="8100000">
+              <a:srgbClr val="000000">
+                <a:alpha val="12000"/>
+              </a:srgbClr>
+            </a:outerShdw>
+          </a:effectLst>
+        </p:spPr>
+      </p:sp>
+      <p:sp>
+        <p:nvSpPr>
+          <p:cNvPr id="19" name="Shape 17"/>
+          <p:cNvSpPr/>
+          <p:nvPr/>
+        </p:nvSpPr>
+        <p:spPr>
+          <a:xfrm>
+            <a:off x="4937760" y="3017520"/>
+            <a:ext cx="502920" cy="502920"/>
+          </a:xfrm>
+          <a:prstGeom prst="ellipse">
+            <a:avLst/>
+          </a:prstGeom>
+          <a:solidFill>
+            <a:srgbClr val="0891B2"/>
+          </a:solidFill>
+          <a:ln/>
+        </p:spPr>
+      </p:sp>
+      <p:sp>
+        <p:nvSpPr>
+          <p:cNvPr id="20" name="Text 18"/>
+          <p:cNvSpPr/>
+          <p:nvPr/>
+        </p:nvSpPr>
+        <p:spPr>
+          <a:xfrm>
+            <a:off x="4937760" y="3017520"/>
+            <a:ext cx="502920" cy="502920"/>
+          </a:xfrm>
+          <a:prstGeom prst="rect">
+            <a:avLst/>
+          </a:prstGeom>
+          <a:noFill/>
+          <a:ln/>
+        </p:spPr>
+        <p:txBody>
+          <a:bodyPr wrap="square" lIns="0" tIns="0" rIns="0" bIns="0" rtlCol="0" anchor="ctr"/>
+          <a:lstStyle/>
+          <a:p>
+            <a:pPr algn="ctr" indent="0" marL="0">
+              <a:buNone/>
+            </a:pPr>
+            <a:r>
+              <a:rPr lang="en-US" sz="2000" b="1" dirty="0">
+                <a:solidFill>
+                  <a:srgbClr val="FFFFFF"/>
+                </a:solidFill>
+                <a:latin typeface="Calibri" pitchFamily="34" charset="0"/>
+                <a:ea typeface="Calibri" pitchFamily="34" charset="-122"/>
+                <a:cs typeface="Calibri" pitchFamily="34" charset="-120"/>
+              </a:rPr>
+              <a:t>4</a:t>
+            </a:r>
+            <a:endParaRPr lang="en-US" sz="2000" dirty="0"/>
+          </a:p>
+        </p:txBody>
+      </p:sp>
+      <p:sp>
+        <p:nvSpPr>
+          <p:cNvPr id="21" name="Text 19"/>
+          <p:cNvSpPr/>
+          <p:nvPr/>
+        </p:nvSpPr>
+        <p:spPr>
+          <a:xfrm>
+            <a:off x="5623560" y="2971800"/>
+            <a:ext cx="2468880" cy="365760"/>
+          </a:xfrm>
+          <a:prstGeom prst="rect">
+            <a:avLst/>
+          </a:prstGeom>
+          <a:noFill/>
+          <a:ln/>
+        </p:spPr>
+        <p:txBody>
+          <a:bodyPr wrap="square" lIns="0" tIns="0" rIns="0" bIns="0" rtlCol="0" anchor="ctr"/>
+          <a:lstStyle/>
+          <a:p>
+            <a:pPr indent="0" marL="0">
+              <a:buNone/>
+            </a:pPr>
+            <a:r>
+              <a:rPr lang="en-US" sz="1600" b="1" dirty="0">
+                <a:solidFill>
+                  <a:srgbClr val="1E293B"/>
+                </a:solidFill>
+                <a:latin typeface="Calibri" pitchFamily="34" charset="0"/>
+                <a:ea typeface="Calibri" pitchFamily="34" charset="-122"/>
+                <a:cs typeface="Calibri" pitchFamily="34" charset="-120"/>
+              </a:rPr>
+              <a:t>Ground Truth</a:t>
+            </a:r>
+            <a:endParaRPr lang="en-US" sz="1600" dirty="0"/>
+          </a:p>
+        </p:txBody>
+      </p:sp>
+      <p:sp>
+        <p:nvSpPr>
+          <p:cNvPr id="22" name="Text 20"/>
+          <p:cNvSpPr/>
+          <p:nvPr/>
+        </p:nvSpPr>
+        <p:spPr>
+          <a:xfrm>
+            <a:off x="5623560" y="3337560"/>
+            <a:ext cx="2468880" cy="457200"/>
+          </a:xfrm>
+          <a:prstGeom prst="rect">
+            <a:avLst/>
+          </a:prstGeom>
+          <a:noFill/>
+          <a:ln/>
+        </p:spPr>
+        <p:txBody>
+          <a:bodyPr wrap="square" lIns="0" tIns="0" rIns="0" bIns="0" rtlCol="0" anchor="ctr"/>
+          <a:lstStyle/>
+          <a:p>
+            <a:pPr indent="0" marL="0">
+              <a:buNone/>
+            </a:pPr>
+            <a:r>
+              <a:rPr lang="en-US" sz="1300" dirty="0">
+                <a:solidFill>
+                  <a:srgbClr val="475569"/>
+                </a:solidFill>
+                <a:latin typeface="Calibri" pitchFamily="34" charset="0"/>
+                <a:ea typeface="Calibri" pitchFamily="34" charset="-122"/>
+                <a:cs typeface="Calibri" pitchFamily="34" charset="-120"/>
+              </a:rPr>
+              <a:t>Cases where experts agree</a:t>
+            </a:r>
+            <a:endParaRPr lang="en-US" sz="1300" dirty="0"/>
+          </a:p>
+        </p:txBody>
+      </p:sp>
+      <p:sp>
+        <p:nvSpPr>
+          <p:cNvPr id="23" name="Text 21"/>
+          <p:cNvSpPr/>
+          <p:nvPr/>
+        </p:nvSpPr>
+        <p:spPr>
+          <a:xfrm>
+            <a:off x="731520" y="4297680"/>
+            <a:ext cx="7680960" cy="457200"/>
+          </a:xfrm>
+          <a:prstGeom prst="rect">
+            <a:avLst/>
+          </a:prstGeom>
+          <a:noFill/>
+          <a:ln/>
+        </p:spPr>
+        <p:txBody>
+          <a:bodyPr wrap="square" lIns="0" tIns="0" rIns="0" bIns="0" rtlCol="0" anchor="ctr"/>
+          <a:lstStyle/>
+          <a:p>
+            <a:pPr indent="0" marL="0">
+              <a:buNone/>
+            </a:pPr>
+            <a:r>
+              <a:rPr lang="en-US" sz="1800" b="1" i="1" dirty="0">
+                <a:solidFill>
+                  <a:srgbClr val="0891B2"/>
+                </a:solidFill>
+                <a:latin typeface="Georgia" pitchFamily="34" charset="0"/>
+                <a:ea typeface="Georgia" pitchFamily="34" charset="-122"/>
+                <a:cs typeface="Georgia" pitchFamily="34" charset="-120"/>
+              </a:rPr>
+              <a:t>The humans set the standard.</a:t>
+            </a:r>
+            <a:endParaRPr lang="en-US" sz="1800" dirty="0"/>
+          </a:p>
+        </p:txBody>
+      </p:sp>
+    </p:spTree>
+  </p:cSld>
+  <p:clrMapOvr>
+    <a:masterClrMapping/>
+  </p:clrMapOvr>
+</p:sld>
+</file>
+
+<file path=ppt/slides/slide11.xml><?xml version="1.0" encoding="utf-8"?>
 <p:sld xmlns:a="http://schemas.openxmlformats.org/drawingml/2006/main" xmlns:r="http://schemas.openxmlformats.org/officeDocument/2006/relationships" xmlns:p="http://schemas.openxmlformats.org/presentationml/2006/main">
   <p:cSld name="Slide 10">
     <p:bg>
@@ -4131,7 +5241,135 @@
 </p:sld>
 </file>
 
-<file path=ppt/slides/slide11.xml><?xml version="1.0" encoding="utf-8"?>
+<file path=ppt/slides/slide12.xml><?xml version="1.0" encoding="utf-8"?>
+<p:sld xmlns:a="http://schemas.openxmlformats.org/drawingml/2006/main" xmlns:p="http://schemas.openxmlformats.org/presentationml/2006/main" xmlns:r="http://schemas.openxmlformats.org/officeDocument/2006/relationships">
+  <p:cSld>
+    <p:bg>
+      <p:bgPr>
+        <a:solidFill>
+          <a:srgbClr val="0F1B2D"/>
+        </a:solidFill>
+        <a:effectLst/>
+      </p:bgPr>
+    </p:bg>
+    <p:spTree>
+      <p:nvGrpSpPr>
+        <p:cNvPr id="1" name=""/>
+        <p:cNvGrpSpPr/>
+        <p:nvPr/>
+      </p:nvGrpSpPr>
+      <p:grpSpPr/>
+      <p:sp>
+        <p:nvSpPr>
+          <p:cNvPr id="2" name="Rectangle 1"/>
+          <p:cNvSpPr/>
+          <p:nvPr/>
+        </p:nvSpPr>
+        <p:spPr>
+          <a:xfrm>
+            <a:off x="0" y="0"/>
+            <a:ext cx="9144000" cy="57150"/>
+          </a:xfrm>
+          <a:prstGeom prst="rect">
+            <a:avLst/>
+          </a:prstGeom>
+          <a:solidFill>
+            <a:srgbClr val="0891B2"/>
+          </a:solidFill>
+          <a:ln>
+            <a:noFill/>
+          </a:ln>
+        </p:spPr>
+        <p:style>
+          <a:lnRef idx="1">
+            <a:schemeClr val="accent1"/>
+          </a:lnRef>
+          <a:fillRef idx="3">
+            <a:schemeClr val="accent1"/>
+          </a:fillRef>
+          <a:effectRef idx="2">
+            <a:schemeClr val="accent1"/>
+          </a:effectRef>
+          <a:fontRef idx="minor">
+            <a:schemeClr val="lt1"/>
+          </a:fontRef>
+        </p:style>
+        <p:txBody>
+          <a:bodyPr rtlCol="0" anchor="ctr"/>
+          <a:lstStyle/>
+          <a:p>
+            <a:pPr algn="ctr"/>
+          </a:p>
+        </p:txBody>
+      </p:sp>
+      <p:sp>
+        <p:nvSpPr>
+          <p:cNvPr id="3" name="TextBox 2"/>
+          <p:cNvSpPr txBox="1"/>
+          <p:nvPr/>
+        </p:nvSpPr>
+        <p:spPr>
+          <a:xfrm>
+            <a:off x="457200" y="274320"/>
+            <a:ext cx="8229600" cy="640080"/>
+          </a:xfrm>
+          <a:prstGeom prst="rect">
+            <a:avLst/>
+          </a:prstGeom>
+          <a:noFill/>
+        </p:spPr>
+        <p:txBody>
+          <a:bodyPr wrap="square">
+            <a:spAutoFit/>
+          </a:bodyPr>
+          <a:lstStyle/>
+          <a:p>
+            <a:pPr algn="ctr"/>
+            <a:r>
+              <a:rPr sz="2800" b="1">
+                <a:solidFill>
+                  <a:srgbClr val="FFFFFF"/>
+                </a:solidFill>
+                <a:latin typeface="Georgia"/>
+              </a:rPr>
+              <a:t>IRR Review</a:t>
+            </a:r>
+          </a:p>
+        </p:txBody>
+      </p:sp>
+      <p:pic>
+        <p:nvPicPr>
+          <p:cNvPr id="4" name="Picture 3" descr="4--IRR-Review.png"/>
+          <p:cNvPicPr>
+            <a:picLocks noChangeAspect="1"/>
+          </p:cNvPicPr>
+          <p:nvPr/>
+        </p:nvPicPr>
+        <p:blipFill>
+          <a:blip r:embed="rId2"/>
+          <a:stretch>
+            <a:fillRect/>
+          </a:stretch>
+        </p:blipFill>
+        <p:spPr>
+          <a:xfrm>
+            <a:off x="1383465" y="1005840"/>
+            <a:ext cx="6377069" cy="3863340"/>
+          </a:xfrm>
+          <a:prstGeom prst="rect">
+            <a:avLst/>
+          </a:prstGeom>
+        </p:spPr>
+      </p:pic>
+    </p:spTree>
+  </p:cSld>
+  <p:clrMapOvr>
+    <a:masterClrMapping/>
+  </p:clrMapOvr>
+</p:sld>
+</file>
+
+<file path=ppt/slides/slide13.xml><?xml version="1.0" encoding="utf-8"?>
 <p:sld xmlns:a="http://schemas.openxmlformats.org/drawingml/2006/main" xmlns:r="http://schemas.openxmlformats.org/officeDocument/2006/relationships" xmlns:p="http://schemas.openxmlformats.org/presentationml/2006/main">
   <p:cSld name="Slide 11">
     <p:bg>
@@ -4300,7 +5538,7 @@
 </p:sld>
 </file>
 
-<file path=ppt/slides/slide12.xml><?xml version="1.0" encoding="utf-8"?>
+<file path=ppt/slides/slide14.xml><?xml version="1.0" encoding="utf-8"?>
 <p:sld xmlns:a="http://schemas.openxmlformats.org/drawingml/2006/main" xmlns:r="http://schemas.openxmlformats.org/officeDocument/2006/relationships" xmlns:p="http://schemas.openxmlformats.org/presentationml/2006/main">
   <p:cSld name="Slide 12">
     <p:bg>
@@ -4839,7 +6077,135 @@
 </p:sld>
 </file>
 
-<file path=ppt/slides/slide13.xml><?xml version="1.0" encoding="utf-8"?>
+<file path=ppt/slides/slide15.xml><?xml version="1.0" encoding="utf-8"?>
+<p:sld xmlns:a="http://schemas.openxmlformats.org/drawingml/2006/main" xmlns:p="http://schemas.openxmlformats.org/presentationml/2006/main" xmlns:r="http://schemas.openxmlformats.org/officeDocument/2006/relationships">
+  <p:cSld>
+    <p:bg>
+      <p:bgPr>
+        <a:solidFill>
+          <a:srgbClr val="0F1B2D"/>
+        </a:solidFill>
+        <a:effectLst/>
+      </p:bgPr>
+    </p:bg>
+    <p:spTree>
+      <p:nvGrpSpPr>
+        <p:cNvPr id="1" name=""/>
+        <p:cNvGrpSpPr/>
+        <p:nvPr/>
+      </p:nvGrpSpPr>
+      <p:grpSpPr/>
+      <p:sp>
+        <p:nvSpPr>
+          <p:cNvPr id="2" name="Rectangle 1"/>
+          <p:cNvSpPr/>
+          <p:nvPr/>
+        </p:nvSpPr>
+        <p:spPr>
+          <a:xfrm>
+            <a:off x="0" y="0"/>
+            <a:ext cx="9144000" cy="57150"/>
+          </a:xfrm>
+          <a:prstGeom prst="rect">
+            <a:avLst/>
+          </a:prstGeom>
+          <a:solidFill>
+            <a:srgbClr val="0891B2"/>
+          </a:solidFill>
+          <a:ln>
+            <a:noFill/>
+          </a:ln>
+        </p:spPr>
+        <p:style>
+          <a:lnRef idx="1">
+            <a:schemeClr val="accent1"/>
+          </a:lnRef>
+          <a:fillRef idx="3">
+            <a:schemeClr val="accent1"/>
+          </a:fillRef>
+          <a:effectRef idx="2">
+            <a:schemeClr val="accent1"/>
+          </a:effectRef>
+          <a:fontRef idx="minor">
+            <a:schemeClr val="lt1"/>
+          </a:fontRef>
+        </p:style>
+        <p:txBody>
+          <a:bodyPr rtlCol="0" anchor="ctr"/>
+          <a:lstStyle/>
+          <a:p>
+            <a:pPr algn="ctr"/>
+          </a:p>
+        </p:txBody>
+      </p:sp>
+      <p:sp>
+        <p:nvSpPr>
+          <p:cNvPr id="3" name="TextBox 2"/>
+          <p:cNvSpPr txBox="1"/>
+          <p:nvPr/>
+        </p:nvSpPr>
+        <p:spPr>
+          <a:xfrm>
+            <a:off x="457200" y="274320"/>
+            <a:ext cx="8229600" cy="640080"/>
+          </a:xfrm>
+          <a:prstGeom prst="rect">
+            <a:avLst/>
+          </a:prstGeom>
+          <a:noFill/>
+        </p:spPr>
+        <p:txBody>
+          <a:bodyPr wrap="square">
+            <a:spAutoFit/>
+          </a:bodyPr>
+          <a:lstStyle/>
+          <a:p>
+            <a:pPr algn="ctr"/>
+            <a:r>
+              <a:rPr sz="2800" b="1">
+                <a:solidFill>
+                  <a:srgbClr val="FFFFFF"/>
+                </a:solidFill>
+                <a:latin typeface="Georgia"/>
+              </a:rPr>
+              <a:t>Synthetic Data</a:t>
+            </a:r>
+          </a:p>
+        </p:txBody>
+      </p:sp>
+      <p:pic>
+        <p:nvPicPr>
+          <p:cNvPr id="4" name="Picture 3" descr="6--Synthetic-Data.png"/>
+          <p:cNvPicPr>
+            <a:picLocks noChangeAspect="1"/>
+          </p:cNvPicPr>
+          <p:nvPr/>
+        </p:nvPicPr>
+        <p:blipFill>
+          <a:blip r:embed="rId2"/>
+          <a:stretch>
+            <a:fillRect/>
+          </a:stretch>
+        </p:blipFill>
+        <p:spPr>
+          <a:xfrm>
+            <a:off x="1462166" y="1005840"/>
+            <a:ext cx="6219666" cy="3863340"/>
+          </a:xfrm>
+          <a:prstGeom prst="rect">
+            <a:avLst/>
+          </a:prstGeom>
+        </p:spPr>
+      </p:pic>
+    </p:spTree>
+  </p:cSld>
+  <p:clrMapOvr>
+    <a:masterClrMapping/>
+  </p:clrMapOvr>
+</p:sld>
+</file>
+
+<file path=ppt/slides/slide16.xml><?xml version="1.0" encoding="utf-8"?>
 <p:sld xmlns:a="http://schemas.openxmlformats.org/drawingml/2006/main" xmlns:r="http://schemas.openxmlformats.org/officeDocument/2006/relationships" xmlns:p="http://schemas.openxmlformats.org/presentationml/2006/main">
   <p:cSld name="Slide 13">
     <p:bg>
@@ -5448,7 +6814,7 @@
 </p:sld>
 </file>
 
-<file path=ppt/slides/slide14.xml><?xml version="1.0" encoding="utf-8"?>
+<file path=ppt/slides/slide17.xml><?xml version="1.0" encoding="utf-8"?>
 <p:sld xmlns:a="http://schemas.openxmlformats.org/drawingml/2006/main" xmlns:r="http://schemas.openxmlformats.org/officeDocument/2006/relationships" xmlns:p="http://schemas.openxmlformats.org/presentationml/2006/main">
   <p:cSld name="Slide 14">
     <p:bg>
@@ -5893,7 +7259,7 @@
 </p:sld>
 </file>
 
-<file path=ppt/slides/slide15.xml><?xml version="1.0" encoding="utf-8"?>
+<file path=ppt/slides/slide18.xml><?xml version="1.0" encoding="utf-8"?>
 <p:sld xmlns:a="http://schemas.openxmlformats.org/drawingml/2006/main" xmlns:r="http://schemas.openxmlformats.org/officeDocument/2006/relationships" xmlns:p="http://schemas.openxmlformats.org/presentationml/2006/main">
   <p:cSld name="Slide 15">
     <p:bg>
@@ -6085,7 +7451,7 @@
 </p:sld>
 </file>
 
-<file path=ppt/slides/slide16.xml><?xml version="1.0" encoding="utf-8"?>
+<file path=ppt/slides/slide19.xml><?xml version="1.0" encoding="utf-8"?>
 <p:sld xmlns:a="http://schemas.openxmlformats.org/drawingml/2006/main" xmlns:r="http://schemas.openxmlformats.org/officeDocument/2006/relationships" xmlns:p="http://schemas.openxmlformats.org/presentationml/2006/main">
   <p:cSld name="Slide 16">
     <p:bg>
@@ -6576,7 +7942,327 @@
 </p:sld>
 </file>
 
-<file path=ppt/slides/slide17.xml><?xml version="1.0" encoding="utf-8"?>
+<file path=ppt/slides/slide2.xml><?xml version="1.0" encoding="utf-8"?>
+<p:sld xmlns:a="http://schemas.openxmlformats.org/drawingml/2006/main" xmlns:r="http://schemas.openxmlformats.org/officeDocument/2006/relationships" xmlns:p="http://schemas.openxmlformats.org/presentationml/2006/main">
+  <p:cSld name="Slide 2">
+    <p:bg>
+      <p:bgPr>
+        <a:solidFill>
+          <a:srgbClr val="0E7490"/>
+        </a:solidFill>
+      </p:bgPr>
+    </p:bg>
+    <p:spTree>
+      <p:nvGrpSpPr>
+        <p:cNvPr id="1" name=""/>
+        <p:cNvGrpSpPr/>
+        <p:nvPr/>
+      </p:nvGrpSpPr>
+      <p:grpSpPr>
+        <a:xfrm>
+          <a:off x="0" y="0"/>
+          <a:ext cx="0" cy="0"/>
+          <a:chOff x="0" y="0"/>
+          <a:chExt cx="0" cy="0"/>
+        </a:xfrm>
+      </p:grpSpPr>
+      <p:sp>
+        <p:nvSpPr>
+          <p:cNvPr id="2" name="Text 0"/>
+          <p:cNvSpPr/>
+          <p:nvPr/>
+        </p:nvSpPr>
+        <p:spPr>
+          <a:xfrm>
+            <a:off x="731520" y="1097280"/>
+            <a:ext cx="1097280" cy="1097280"/>
+          </a:xfrm>
+          <a:prstGeom prst="rect">
+            <a:avLst/>
+          </a:prstGeom>
+          <a:noFill/>
+          <a:ln/>
+        </p:spPr>
+        <p:txBody>
+          <a:bodyPr wrap="square" lIns="0" tIns="0" rIns="0" bIns="0" rtlCol="0" anchor="ctr"/>
+          <a:lstStyle/>
+          <a:p>
+            <a:pPr algn="ctr" indent="0" marL="0">
+              <a:buNone/>
+            </a:pPr>
+            <a:r>
+              <a:rPr lang="en-US" sz="4800" b="1" dirty="0">
+                <a:solidFill>
+                  <a:srgbClr val="FFFFFF"/>
+                </a:solidFill>
+                <a:latin typeface="Georgia" pitchFamily="34" charset="0"/>
+                <a:ea typeface="Georgia" pitchFamily="34" charset="-122"/>
+                <a:cs typeface="Georgia" pitchFamily="34" charset="-120"/>
+              </a:rPr>
+              <a:t>I</a:t>
+            </a:r>
+            <a:endParaRPr lang="en-US" sz="4800" dirty="0"/>
+          </a:p>
+        </p:txBody>
+      </p:sp>
+      <p:sp>
+        <p:nvSpPr>
+          <p:cNvPr id="3" name="Shape 1"/>
+          <p:cNvSpPr/>
+          <p:nvPr/>
+        </p:nvSpPr>
+        <p:spPr>
+          <a:xfrm>
+            <a:off x="2011680" y="1371600"/>
+            <a:ext cx="36576" cy="640080"/>
+          </a:xfrm>
+          <a:prstGeom prst="rect">
+            <a:avLst/>
+          </a:prstGeom>
+          <a:solidFill>
+            <a:srgbClr val="22D3EE"/>
+          </a:solidFill>
+          <a:ln/>
+        </p:spPr>
+      </p:sp>
+      <p:sp>
+        <p:nvSpPr>
+          <p:cNvPr id="4" name="Text 2"/>
+          <p:cNvSpPr/>
+          <p:nvPr/>
+        </p:nvSpPr>
+        <p:spPr>
+          <a:xfrm>
+            <a:off x="2286000" y="1005840"/>
+            <a:ext cx="5486400" cy="1188720"/>
+          </a:xfrm>
+          <a:prstGeom prst="rect">
+            <a:avLst/>
+          </a:prstGeom>
+          <a:noFill/>
+          <a:ln/>
+        </p:spPr>
+        <p:txBody>
+          <a:bodyPr wrap="square" lIns="0" tIns="0" rIns="0" bIns="0" rtlCol="0" anchor="ctr"/>
+          <a:lstStyle/>
+          <a:p>
+            <a:pPr indent="0" marL="0">
+              <a:lnSpc>
+                <a:spcPct val="110000"/>
+              </a:lnSpc>
+              <a:buNone/>
+            </a:pPr>
+            <a:r>
+              <a:rPr lang="en-US" sz="3600" b="1" dirty="0">
+                <a:solidFill>
+                  <a:srgbClr val="FFFFFF"/>
+                </a:solidFill>
+                <a:latin typeface="Georgia" pitchFamily="34" charset="0"/>
+                <a:ea typeface="Georgia" pitchFamily="34" charset="-122"/>
+                <a:cs typeface="Georgia" pitchFamily="34" charset="-120"/>
+              </a:rPr>
+              <a:t>Connecting to</a:t>
+            </a:r>
+            <a:endParaRPr lang="en-US" sz="3600" dirty="0"/>
+          </a:p>
+          <a:p>
+            <a:pPr indent="0" marL="0">
+              <a:lnSpc>
+                <a:spcPct val="110000"/>
+              </a:lnSpc>
+              <a:buNone/>
+            </a:pPr>
+            <a:r>
+              <a:rPr lang="en-US" sz="3600" b="1" dirty="0">
+                <a:solidFill>
+                  <a:srgbClr val="FFFFFF"/>
+                </a:solidFill>
+                <a:latin typeface="Georgia" pitchFamily="34" charset="0"/>
+                <a:ea typeface="Georgia" pitchFamily="34" charset="-122"/>
+                <a:cs typeface="Georgia" pitchFamily="34" charset="-120"/>
+              </a:rPr>
+              <a:t>This Morning</a:t>
+            </a:r>
+            <a:endParaRPr lang="en-US" sz="3600" dirty="0"/>
+          </a:p>
+        </p:txBody>
+      </p:sp>
+      <p:sp>
+        <p:nvSpPr>
+          <p:cNvPr id="5" name="Text 3"/>
+          <p:cNvSpPr/>
+          <p:nvPr/>
+        </p:nvSpPr>
+        <p:spPr>
+          <a:xfrm>
+            <a:off x="731520" y="4389120"/>
+            <a:ext cx="2743200" cy="365760"/>
+          </a:xfrm>
+          <a:prstGeom prst="rect">
+            <a:avLst/>
+          </a:prstGeom>
+          <a:noFill/>
+          <a:ln/>
+        </p:spPr>
+        <p:txBody>
+          <a:bodyPr wrap="square" lIns="0" tIns="0" rIns="0" bIns="0" rtlCol="0" anchor="ctr"/>
+          <a:lstStyle/>
+          <a:p>
+            <a:pPr indent="0" marL="0">
+              <a:buNone/>
+            </a:pPr>
+            <a:r>
+              <a:rPr lang="en-US" sz="1300" i="1" dirty="0">
+                <a:solidFill>
+                  <a:srgbClr val="22D3EE"/>
+                </a:solidFill>
+                <a:latin typeface="Calibri" pitchFamily="34" charset="0"/>
+                <a:ea typeface="Calibri" pitchFamily="34" charset="-122"/>
+                <a:cs typeface="Calibri" pitchFamily="34" charset="-120"/>
+              </a:rPr>
+              <a:t>5 minutes</a:t>
+            </a:r>
+            <a:endParaRPr lang="en-US" sz="1300" dirty="0"/>
+          </a:p>
+        </p:txBody>
+      </p:sp>
+    </p:spTree>
+  </p:cSld>
+  <p:clrMapOvr>
+    <a:masterClrMapping/>
+  </p:clrMapOvr>
+</p:sld>
+</file>
+
+<file path=ppt/slides/slide20.xml><?xml version="1.0" encoding="utf-8"?>
+<p:sld xmlns:a="http://schemas.openxmlformats.org/drawingml/2006/main" xmlns:p="http://schemas.openxmlformats.org/presentationml/2006/main" xmlns:r="http://schemas.openxmlformats.org/officeDocument/2006/relationships">
+  <p:cSld>
+    <p:bg>
+      <p:bgPr>
+        <a:solidFill>
+          <a:srgbClr val="0F1B2D"/>
+        </a:solidFill>
+        <a:effectLst/>
+      </p:bgPr>
+    </p:bg>
+    <p:spTree>
+      <p:nvGrpSpPr>
+        <p:cNvPr id="1" name=""/>
+        <p:cNvGrpSpPr/>
+        <p:nvPr/>
+      </p:nvGrpSpPr>
+      <p:grpSpPr/>
+      <p:sp>
+        <p:nvSpPr>
+          <p:cNvPr id="2" name="Rectangle 1"/>
+          <p:cNvSpPr/>
+          <p:nvPr/>
+        </p:nvSpPr>
+        <p:spPr>
+          <a:xfrm>
+            <a:off x="0" y="0"/>
+            <a:ext cx="9144000" cy="57150"/>
+          </a:xfrm>
+          <a:prstGeom prst="rect">
+            <a:avLst/>
+          </a:prstGeom>
+          <a:solidFill>
+            <a:srgbClr val="0891B2"/>
+          </a:solidFill>
+          <a:ln>
+            <a:noFill/>
+          </a:ln>
+        </p:spPr>
+        <p:style>
+          <a:lnRef idx="1">
+            <a:schemeClr val="accent1"/>
+          </a:lnRef>
+          <a:fillRef idx="3">
+            <a:schemeClr val="accent1"/>
+          </a:fillRef>
+          <a:effectRef idx="2">
+            <a:schemeClr val="accent1"/>
+          </a:effectRef>
+          <a:fontRef idx="minor">
+            <a:schemeClr val="lt1"/>
+          </a:fontRef>
+        </p:style>
+        <p:txBody>
+          <a:bodyPr rtlCol="0" anchor="ctr"/>
+          <a:lstStyle/>
+          <a:p>
+            <a:pPr algn="ctr"/>
+          </a:p>
+        </p:txBody>
+      </p:sp>
+      <p:sp>
+        <p:nvSpPr>
+          <p:cNvPr id="3" name="TextBox 2"/>
+          <p:cNvSpPr txBox="1"/>
+          <p:nvPr/>
+        </p:nvSpPr>
+        <p:spPr>
+          <a:xfrm>
+            <a:off x="457200" y="274320"/>
+            <a:ext cx="8229600" cy="640080"/>
+          </a:xfrm>
+          <a:prstGeom prst="rect">
+            <a:avLst/>
+          </a:prstGeom>
+          <a:noFill/>
+        </p:spPr>
+        <p:txBody>
+          <a:bodyPr wrap="square">
+            <a:spAutoFit/>
+          </a:bodyPr>
+          <a:lstStyle/>
+          <a:p>
+            <a:pPr algn="ctr"/>
+            <a:r>
+              <a:rPr sz="2800" b="1">
+                <a:solidFill>
+                  <a:srgbClr val="FFFFFF"/>
+                </a:solidFill>
+                <a:latin typeface="Georgia"/>
+              </a:rPr>
+              <a:t>Pro App — Add Data</a:t>
+            </a:r>
+          </a:p>
+        </p:txBody>
+      </p:sp>
+      <p:pic>
+        <p:nvPicPr>
+          <p:cNvPr id="4" name="Picture 3" descr="1--Add-Data-Form.png"/>
+          <p:cNvPicPr>
+            <a:picLocks noChangeAspect="1"/>
+          </p:cNvPicPr>
+          <p:nvPr/>
+        </p:nvPicPr>
+        <p:blipFill>
+          <a:blip r:embed="rId2"/>
+          <a:stretch>
+            <a:fillRect/>
+          </a:stretch>
+        </p:blipFill>
+        <p:spPr>
+          <a:xfrm>
+            <a:off x="3510642" y="1005840"/>
+            <a:ext cx="2122714" cy="3863340"/>
+          </a:xfrm>
+          <a:prstGeom prst="rect">
+            <a:avLst/>
+          </a:prstGeom>
+        </p:spPr>
+      </p:pic>
+    </p:spTree>
+  </p:cSld>
+  <p:clrMapOvr>
+    <a:masterClrMapping/>
+  </p:clrMapOvr>
+</p:sld>
+</file>
+
+<file path=ppt/slides/slide21.xml><?xml version="1.0" encoding="utf-8"?>
 <p:sld xmlns:a="http://schemas.openxmlformats.org/drawingml/2006/main" xmlns:r="http://schemas.openxmlformats.org/officeDocument/2006/relationships" xmlns:p="http://schemas.openxmlformats.org/presentationml/2006/main">
   <p:cSld name="Slide 17">
     <p:bg>
@@ -7282,7 +8968,7 @@
 </p:sld>
 </file>
 
-<file path=ppt/slides/slide18.xml><?xml version="1.0" encoding="utf-8"?>
+<file path=ppt/slides/slide22.xml><?xml version="1.0" encoding="utf-8"?>
 <p:sld xmlns:a="http://schemas.openxmlformats.org/drawingml/2006/main" xmlns:r="http://schemas.openxmlformats.org/officeDocument/2006/relationships" xmlns:p="http://schemas.openxmlformats.org/presentationml/2006/main">
   <p:cSld name="Slide 18">
     <p:bg>
@@ -7474,7 +9160,7 @@
 </p:sld>
 </file>
 
-<file path=ppt/slides/slide19.xml><?xml version="1.0" encoding="utf-8"?>
+<file path=ppt/slides/slide23.xml><?xml version="1.0" encoding="utf-8"?>
 <p:sld xmlns:a="http://schemas.openxmlformats.org/drawingml/2006/main" xmlns:r="http://schemas.openxmlformats.org/officeDocument/2006/relationships" xmlns:p="http://schemas.openxmlformats.org/presentationml/2006/main">
   <p:cSld name="Slide 19">
     <p:bg>
@@ -8601,199 +10287,7 @@
 </p:sld>
 </file>
 
-<file path=ppt/slides/slide2.xml><?xml version="1.0" encoding="utf-8"?>
-<p:sld xmlns:a="http://schemas.openxmlformats.org/drawingml/2006/main" xmlns:r="http://schemas.openxmlformats.org/officeDocument/2006/relationships" xmlns:p="http://schemas.openxmlformats.org/presentationml/2006/main">
-  <p:cSld name="Slide 2">
-    <p:bg>
-      <p:bgPr>
-        <a:solidFill>
-          <a:srgbClr val="0E7490"/>
-        </a:solidFill>
-      </p:bgPr>
-    </p:bg>
-    <p:spTree>
-      <p:nvGrpSpPr>
-        <p:cNvPr id="1" name=""/>
-        <p:cNvGrpSpPr/>
-        <p:nvPr/>
-      </p:nvGrpSpPr>
-      <p:grpSpPr>
-        <a:xfrm>
-          <a:off x="0" y="0"/>
-          <a:ext cx="0" cy="0"/>
-          <a:chOff x="0" y="0"/>
-          <a:chExt cx="0" cy="0"/>
-        </a:xfrm>
-      </p:grpSpPr>
-      <p:sp>
-        <p:nvSpPr>
-          <p:cNvPr id="2" name="Text 0"/>
-          <p:cNvSpPr/>
-          <p:nvPr/>
-        </p:nvSpPr>
-        <p:spPr>
-          <a:xfrm>
-            <a:off x="731520" y="1097280"/>
-            <a:ext cx="1097280" cy="1097280"/>
-          </a:xfrm>
-          <a:prstGeom prst="rect">
-            <a:avLst/>
-          </a:prstGeom>
-          <a:noFill/>
-          <a:ln/>
-        </p:spPr>
-        <p:txBody>
-          <a:bodyPr wrap="square" lIns="0" tIns="0" rIns="0" bIns="0" rtlCol="0" anchor="ctr"/>
-          <a:lstStyle/>
-          <a:p>
-            <a:pPr algn="ctr" indent="0" marL="0">
-              <a:buNone/>
-            </a:pPr>
-            <a:r>
-              <a:rPr lang="en-US" sz="4800" b="1" dirty="0">
-                <a:solidFill>
-                  <a:srgbClr val="FFFFFF"/>
-                </a:solidFill>
-                <a:latin typeface="Georgia" pitchFamily="34" charset="0"/>
-                <a:ea typeface="Georgia" pitchFamily="34" charset="-122"/>
-                <a:cs typeface="Georgia" pitchFamily="34" charset="-120"/>
-              </a:rPr>
-              <a:t>I</a:t>
-            </a:r>
-            <a:endParaRPr lang="en-US" sz="4800" dirty="0"/>
-          </a:p>
-        </p:txBody>
-      </p:sp>
-      <p:sp>
-        <p:nvSpPr>
-          <p:cNvPr id="3" name="Shape 1"/>
-          <p:cNvSpPr/>
-          <p:nvPr/>
-        </p:nvSpPr>
-        <p:spPr>
-          <a:xfrm>
-            <a:off x="2011680" y="1371600"/>
-            <a:ext cx="36576" cy="640080"/>
-          </a:xfrm>
-          <a:prstGeom prst="rect">
-            <a:avLst/>
-          </a:prstGeom>
-          <a:solidFill>
-            <a:srgbClr val="22D3EE"/>
-          </a:solidFill>
-          <a:ln/>
-        </p:spPr>
-      </p:sp>
-      <p:sp>
-        <p:nvSpPr>
-          <p:cNvPr id="4" name="Text 2"/>
-          <p:cNvSpPr/>
-          <p:nvPr/>
-        </p:nvSpPr>
-        <p:spPr>
-          <a:xfrm>
-            <a:off x="2286000" y="1005840"/>
-            <a:ext cx="5486400" cy="1188720"/>
-          </a:xfrm>
-          <a:prstGeom prst="rect">
-            <a:avLst/>
-          </a:prstGeom>
-          <a:noFill/>
-          <a:ln/>
-        </p:spPr>
-        <p:txBody>
-          <a:bodyPr wrap="square" lIns="0" tIns="0" rIns="0" bIns="0" rtlCol="0" anchor="ctr"/>
-          <a:lstStyle/>
-          <a:p>
-            <a:pPr indent="0" marL="0">
-              <a:lnSpc>
-                <a:spcPct val="110000"/>
-              </a:lnSpc>
-              <a:buNone/>
-            </a:pPr>
-            <a:r>
-              <a:rPr lang="en-US" sz="3600" b="1" dirty="0">
-                <a:solidFill>
-                  <a:srgbClr val="FFFFFF"/>
-                </a:solidFill>
-                <a:latin typeface="Georgia" pitchFamily="34" charset="0"/>
-                <a:ea typeface="Georgia" pitchFamily="34" charset="-122"/>
-                <a:cs typeface="Georgia" pitchFamily="34" charset="-120"/>
-              </a:rPr>
-              <a:t>Connecting to</a:t>
-            </a:r>
-            <a:endParaRPr lang="en-US" sz="3600" dirty="0"/>
-          </a:p>
-          <a:p>
-            <a:pPr indent="0" marL="0">
-              <a:lnSpc>
-                <a:spcPct val="110000"/>
-              </a:lnSpc>
-              <a:buNone/>
-            </a:pPr>
-            <a:r>
-              <a:rPr lang="en-US" sz="3600" b="1" dirty="0">
-                <a:solidFill>
-                  <a:srgbClr val="FFFFFF"/>
-                </a:solidFill>
-                <a:latin typeface="Georgia" pitchFamily="34" charset="0"/>
-                <a:ea typeface="Georgia" pitchFamily="34" charset="-122"/>
-                <a:cs typeface="Georgia" pitchFamily="34" charset="-120"/>
-              </a:rPr>
-              <a:t>This Morning</a:t>
-            </a:r>
-            <a:endParaRPr lang="en-US" sz="3600" dirty="0"/>
-          </a:p>
-        </p:txBody>
-      </p:sp>
-      <p:sp>
-        <p:nvSpPr>
-          <p:cNvPr id="5" name="Text 3"/>
-          <p:cNvSpPr/>
-          <p:nvPr/>
-        </p:nvSpPr>
-        <p:spPr>
-          <a:xfrm>
-            <a:off x="731520" y="4389120"/>
-            <a:ext cx="2743200" cy="365760"/>
-          </a:xfrm>
-          <a:prstGeom prst="rect">
-            <a:avLst/>
-          </a:prstGeom>
-          <a:noFill/>
-          <a:ln/>
-        </p:spPr>
-        <p:txBody>
-          <a:bodyPr wrap="square" lIns="0" tIns="0" rIns="0" bIns="0" rtlCol="0" anchor="ctr"/>
-          <a:lstStyle/>
-          <a:p>
-            <a:pPr indent="0" marL="0">
-              <a:buNone/>
-            </a:pPr>
-            <a:r>
-              <a:rPr lang="en-US" sz="1300" i="1" dirty="0">
-                <a:solidFill>
-                  <a:srgbClr val="22D3EE"/>
-                </a:solidFill>
-                <a:latin typeface="Calibri" pitchFamily="34" charset="0"/>
-                <a:ea typeface="Calibri" pitchFamily="34" charset="-122"/>
-                <a:cs typeface="Calibri" pitchFamily="34" charset="-120"/>
-              </a:rPr>
-              <a:t>5 minutes</a:t>
-            </a:r>
-            <a:endParaRPr lang="en-US" sz="1300" dirty="0"/>
-          </a:p>
-        </p:txBody>
-      </p:sp>
-    </p:spTree>
-  </p:cSld>
-  <p:clrMapOvr>
-    <a:masterClrMapping/>
-  </p:clrMapOvr>
-</p:sld>
-</file>
-
-<file path=ppt/slides/slide20.xml><?xml version="1.0" encoding="utf-8"?>
+<file path=ppt/slides/slide24.xml><?xml version="1.0" encoding="utf-8"?>
 <p:sld xmlns:a="http://schemas.openxmlformats.org/drawingml/2006/main" xmlns:r="http://schemas.openxmlformats.org/officeDocument/2006/relationships" xmlns:p="http://schemas.openxmlformats.org/presentationml/2006/main">
   <p:cSld name="Slide 20">
     <p:bg>
@@ -9152,7 +10646,7 @@
 </p:sld>
 </file>
 
-<file path=ppt/slides/slide21.xml><?xml version="1.0" encoding="utf-8"?>
+<file path=ppt/slides/slide25.xml><?xml version="1.0" encoding="utf-8"?>
 <p:sld xmlns:a="http://schemas.openxmlformats.org/drawingml/2006/main" xmlns:r="http://schemas.openxmlformats.org/officeDocument/2006/relationships" xmlns:p="http://schemas.openxmlformats.org/presentationml/2006/main">
   <p:cSld name="Slide 21">
     <p:bg>
@@ -11782,6 +13276,134 @@
 </file>
 
 <file path=ppt/slides/slide8.xml><?xml version="1.0" encoding="utf-8"?>
+<p:sld xmlns:a="http://schemas.openxmlformats.org/drawingml/2006/main" xmlns:p="http://schemas.openxmlformats.org/presentationml/2006/main" xmlns:r="http://schemas.openxmlformats.org/officeDocument/2006/relationships">
+  <p:cSld>
+    <p:bg>
+      <p:bgPr>
+        <a:solidFill>
+          <a:srgbClr val="0F1B2D"/>
+        </a:solidFill>
+        <a:effectLst/>
+      </p:bgPr>
+    </p:bg>
+    <p:spTree>
+      <p:nvGrpSpPr>
+        <p:cNvPr id="1" name=""/>
+        <p:cNvGrpSpPr/>
+        <p:nvPr/>
+      </p:nvGrpSpPr>
+      <p:grpSpPr/>
+      <p:sp>
+        <p:nvSpPr>
+          <p:cNvPr id="2" name="Rectangle 1"/>
+          <p:cNvSpPr/>
+          <p:nvPr/>
+        </p:nvSpPr>
+        <p:spPr>
+          <a:xfrm>
+            <a:off x="0" y="0"/>
+            <a:ext cx="9144000" cy="57150"/>
+          </a:xfrm>
+          <a:prstGeom prst="rect">
+            <a:avLst/>
+          </a:prstGeom>
+          <a:solidFill>
+            <a:srgbClr val="0891B2"/>
+          </a:solidFill>
+          <a:ln>
+            <a:noFill/>
+          </a:ln>
+        </p:spPr>
+        <p:style>
+          <a:lnRef idx="1">
+            <a:schemeClr val="accent1"/>
+          </a:lnRef>
+          <a:fillRef idx="3">
+            <a:schemeClr val="accent1"/>
+          </a:fillRef>
+          <a:effectRef idx="2">
+            <a:schemeClr val="accent1"/>
+          </a:effectRef>
+          <a:fontRef idx="minor">
+            <a:schemeClr val="lt1"/>
+          </a:fontRef>
+        </p:style>
+        <p:txBody>
+          <a:bodyPr rtlCol="0" anchor="ctr"/>
+          <a:lstStyle/>
+          <a:p>
+            <a:pPr algn="ctr"/>
+          </a:p>
+        </p:txBody>
+      </p:sp>
+      <p:sp>
+        <p:nvSpPr>
+          <p:cNvPr id="3" name="TextBox 2"/>
+          <p:cNvSpPr txBox="1"/>
+          <p:nvPr/>
+        </p:nvSpPr>
+        <p:spPr>
+          <a:xfrm>
+            <a:off x="457200" y="274320"/>
+            <a:ext cx="8229600" cy="640080"/>
+          </a:xfrm>
+          <a:prstGeom prst="rect">
+            <a:avLst/>
+          </a:prstGeom>
+          <a:noFill/>
+        </p:spPr>
+        <p:txBody>
+          <a:bodyPr wrap="square">
+            <a:spAutoFit/>
+          </a:bodyPr>
+          <a:lstStyle/>
+          <a:p>
+            <a:pPr algn="ctr"/>
+            <a:r>
+              <a:rPr sz="2800" b="1">
+                <a:solidFill>
+                  <a:srgbClr val="FFFFFF"/>
+                </a:solidFill>
+                <a:latin typeface="Georgia"/>
+              </a:rPr>
+              <a:t>SARF Editor</a:t>
+            </a:r>
+          </a:p>
+        </p:txBody>
+      </p:sp>
+      <p:pic>
+        <p:nvPicPr>
+          <p:cNvPr id="4" name="Picture 3" descr="2--IRR-SARF-Editor.png"/>
+          <p:cNvPicPr>
+            <a:picLocks noChangeAspect="1"/>
+          </p:cNvPicPr>
+          <p:nvPr/>
+        </p:nvPicPr>
+        <p:blipFill>
+          <a:blip r:embed="rId2"/>
+          <a:stretch>
+            <a:fillRect/>
+          </a:stretch>
+        </p:blipFill>
+        <p:spPr>
+          <a:xfrm>
+            <a:off x="2154437" y="1005840"/>
+            <a:ext cx="4835124" cy="3863340"/>
+          </a:xfrm>
+          <a:prstGeom prst="rect">
+            <a:avLst/>
+          </a:prstGeom>
+        </p:spPr>
+      </p:pic>
+    </p:spTree>
+  </p:cSld>
+  <p:clrMapOvr>
+    <a:masterClrMapping/>
+  </p:clrMapOvr>
+</p:sld>
+</file>
+
+<file path=ppt/slides/slide9.xml><?xml version="1.0" encoding="utf-8"?>
 <p:sld xmlns:a="http://schemas.openxmlformats.org/drawingml/2006/main" xmlns:r="http://schemas.openxmlformats.org/officeDocument/2006/relationships" xmlns:p="http://schemas.openxmlformats.org/presentationml/2006/main">
   <p:cSld name="Slide 8">
     <p:bg>
@@ -11962,772 +13584,6 @@
               <a:t>10 minutes</a:t>
             </a:r>
             <a:endParaRPr lang="en-US" sz="1300" dirty="0"/>
-          </a:p>
-        </p:txBody>
-      </p:sp>
-    </p:spTree>
-  </p:cSld>
-  <p:clrMapOvr>
-    <a:masterClrMapping/>
-  </p:clrMapOvr>
-</p:sld>
-</file>
-
-<file path=ppt/slides/slide9.xml><?xml version="1.0" encoding="utf-8"?>
-<p:sld xmlns:a="http://schemas.openxmlformats.org/drawingml/2006/main" xmlns:r="http://schemas.openxmlformats.org/officeDocument/2006/relationships" xmlns:p="http://schemas.openxmlformats.org/presentationml/2006/main">
-  <p:cSld name="Slide 9">
-    <p:bg>
-      <p:bgPr>
-        <a:solidFill>
-          <a:srgbClr val="F0F4F8"/>
-        </a:solidFill>
-      </p:bgPr>
-    </p:bg>
-    <p:spTree>
-      <p:nvGrpSpPr>
-        <p:cNvPr id="1" name=""/>
-        <p:cNvGrpSpPr/>
-        <p:nvPr/>
-      </p:nvGrpSpPr>
-      <p:grpSpPr>
-        <a:xfrm>
-          <a:off x="0" y="0"/>
-          <a:ext cx="0" cy="0"/>
-          <a:chOff x="0" y="0"/>
-          <a:chExt cx="0" cy="0"/>
-        </a:xfrm>
-      </p:grpSpPr>
-      <p:sp>
-        <p:nvSpPr>
-          <p:cNvPr id="2" name="Text 0"/>
-          <p:cNvSpPr/>
-          <p:nvPr/>
-        </p:nvSpPr>
-        <p:spPr>
-          <a:xfrm>
-            <a:off x="731520" y="365760"/>
-            <a:ext cx="7680960" cy="640080"/>
-          </a:xfrm>
-          <a:prstGeom prst="rect">
-            <a:avLst/>
-          </a:prstGeom>
-          <a:noFill/>
-          <a:ln/>
-        </p:spPr>
-        <p:txBody>
-          <a:bodyPr wrap="square" lIns="0" tIns="0" rIns="0" bIns="0" rtlCol="0" anchor="ctr"/>
-          <a:lstStyle/>
-          <a:p>
-            <a:pPr indent="0" marL="0">
-              <a:buNone/>
-            </a:pPr>
-            <a:r>
-              <a:rPr lang="en-US" sz="2600" b="1" dirty="0">
-                <a:solidFill>
-                  <a:srgbClr val="1E293B"/>
-                </a:solidFill>
-                <a:latin typeface="Georgia" pitchFamily="34" charset="0"/>
-                <a:ea typeface="Georgia" pitchFamily="34" charset="-122"/>
-                <a:cs typeface="Georgia" pitchFamily="34" charset="-120"/>
-              </a:rPr>
-              <a:t>Ground Truth = What the Experts Agreed On</a:t>
-            </a:r>
-            <a:endParaRPr lang="en-US" sz="2600" dirty="0"/>
-          </a:p>
-        </p:txBody>
-      </p:sp>
-      <p:sp>
-        <p:nvSpPr>
-          <p:cNvPr id="3" name="Shape 1"/>
-          <p:cNvSpPr/>
-          <p:nvPr/>
-        </p:nvSpPr>
-        <p:spPr>
-          <a:xfrm>
-            <a:off x="731520" y="1280160"/>
-            <a:ext cx="3657600" cy="1234440"/>
-          </a:xfrm>
-          <a:prstGeom prst="rect">
-            <a:avLst/>
-          </a:prstGeom>
-          <a:solidFill>
-            <a:srgbClr val="FFFFFF"/>
-          </a:solidFill>
-          <a:ln/>
-          <a:effectLst>
-            <a:outerShdw sx="100000" sy="100000" kx="0" ky="0" algn="bl" rotWithShape="0" blurRad="76200" dist="25400" dir="8100000">
-              <a:srgbClr val="000000">
-                <a:alpha val="12000"/>
-              </a:srgbClr>
-            </a:outerShdw>
-          </a:effectLst>
-        </p:spPr>
-      </p:sp>
-      <p:sp>
-        <p:nvSpPr>
-          <p:cNvPr id="4" name="Shape 2"/>
-          <p:cNvSpPr/>
-          <p:nvPr/>
-        </p:nvSpPr>
-        <p:spPr>
-          <a:xfrm>
-            <a:off x="914400" y="1508760"/>
-            <a:ext cx="502920" cy="502920"/>
-          </a:xfrm>
-          <a:prstGeom prst="ellipse">
-            <a:avLst/>
-          </a:prstGeom>
-          <a:solidFill>
-            <a:srgbClr val="0891B2"/>
-          </a:solidFill>
-          <a:ln/>
-        </p:spPr>
-      </p:sp>
-      <p:sp>
-        <p:nvSpPr>
-          <p:cNvPr id="5" name="Text 3"/>
-          <p:cNvSpPr/>
-          <p:nvPr/>
-        </p:nvSpPr>
-        <p:spPr>
-          <a:xfrm>
-            <a:off x="914400" y="1508760"/>
-            <a:ext cx="502920" cy="502920"/>
-          </a:xfrm>
-          <a:prstGeom prst="rect">
-            <a:avLst/>
-          </a:prstGeom>
-          <a:noFill/>
-          <a:ln/>
-        </p:spPr>
-        <p:txBody>
-          <a:bodyPr wrap="square" lIns="0" tIns="0" rIns="0" bIns="0" rtlCol="0" anchor="ctr"/>
-          <a:lstStyle/>
-          <a:p>
-            <a:pPr algn="ctr" indent="0" marL="0">
-              <a:buNone/>
-            </a:pPr>
-            <a:r>
-              <a:rPr lang="en-US" sz="2000" b="1" dirty="0">
-                <a:solidFill>
-                  <a:srgbClr val="FFFFFF"/>
-                </a:solidFill>
-                <a:latin typeface="Calibri" pitchFamily="34" charset="0"/>
-                <a:ea typeface="Calibri" pitchFamily="34" charset="-122"/>
-                <a:cs typeface="Calibri" pitchFamily="34" charset="-120"/>
-              </a:rPr>
-              <a:t>1</a:t>
-            </a:r>
-            <a:endParaRPr lang="en-US" sz="2000" dirty="0"/>
-          </a:p>
-        </p:txBody>
-      </p:sp>
-      <p:sp>
-        <p:nvSpPr>
-          <p:cNvPr id="6" name="Text 4"/>
-          <p:cNvSpPr/>
-          <p:nvPr/>
-        </p:nvSpPr>
-        <p:spPr>
-          <a:xfrm>
-            <a:off x="1600200" y="1463040"/>
-            <a:ext cx="2468880" cy="365760"/>
-          </a:xfrm>
-          <a:prstGeom prst="rect">
-            <a:avLst/>
-          </a:prstGeom>
-          <a:noFill/>
-          <a:ln/>
-        </p:spPr>
-        <p:txBody>
-          <a:bodyPr wrap="square" lIns="0" tIns="0" rIns="0" bIns="0" rtlCol="0" anchor="ctr"/>
-          <a:lstStyle/>
-          <a:p>
-            <a:pPr indent="0" marL="0">
-              <a:buNone/>
-            </a:pPr>
-            <a:r>
-              <a:rPr lang="en-US" sz="1600" b="1" dirty="0">
-                <a:solidFill>
-                  <a:srgbClr val="1E293B"/>
-                </a:solidFill>
-                <a:latin typeface="Calibri" pitchFamily="34" charset="0"/>
-                <a:ea typeface="Calibri" pitchFamily="34" charset="-122"/>
-                <a:cs typeface="Calibri" pitchFamily="34" charset="-120"/>
-              </a:rPr>
-              <a:t>Train</a:t>
-            </a:r>
-            <a:endParaRPr lang="en-US" sz="1600" dirty="0"/>
-          </a:p>
-        </p:txBody>
-      </p:sp>
-      <p:sp>
-        <p:nvSpPr>
-          <p:cNvPr id="7" name="Text 5"/>
-          <p:cNvSpPr/>
-          <p:nvPr/>
-        </p:nvSpPr>
-        <p:spPr>
-          <a:xfrm>
-            <a:off x="1600200" y="1828800"/>
-            <a:ext cx="2468880" cy="457200"/>
-          </a:xfrm>
-          <a:prstGeom prst="rect">
-            <a:avLst/>
-          </a:prstGeom>
-          <a:noFill/>
-          <a:ln/>
-        </p:spPr>
-        <p:txBody>
-          <a:bodyPr wrap="square" lIns="0" tIns="0" rIns="0" bIns="0" rtlCol="0" anchor="ctr"/>
-          <a:lstStyle/>
-          <a:p>
-            <a:pPr indent="0" marL="0">
-              <a:buNone/>
-            </a:pPr>
-            <a:r>
-              <a:rPr lang="en-US" sz="1300" dirty="0">
-                <a:solidFill>
-                  <a:srgbClr val="475569"/>
-                </a:solidFill>
-                <a:latin typeface="Calibri" pitchFamily="34" charset="0"/>
-                <a:ea typeface="Calibri" pitchFamily="34" charset="-122"/>
-                <a:cs typeface="Calibri" pitchFamily="34" charset="-120"/>
-              </a:rPr>
-              <a:t>Human experts learn SARF coding</a:t>
-            </a:r>
-            <a:endParaRPr lang="en-US" sz="1300" dirty="0"/>
-          </a:p>
-        </p:txBody>
-      </p:sp>
-      <p:sp>
-        <p:nvSpPr>
-          <p:cNvPr id="8" name="Shape 6"/>
-          <p:cNvSpPr/>
-          <p:nvPr/>
-        </p:nvSpPr>
-        <p:spPr>
-          <a:xfrm>
-            <a:off x="4754880" y="1280160"/>
-            <a:ext cx="3657600" cy="1234440"/>
-          </a:xfrm>
-          <a:prstGeom prst="rect">
-            <a:avLst/>
-          </a:prstGeom>
-          <a:solidFill>
-            <a:srgbClr val="FFFFFF"/>
-          </a:solidFill>
-          <a:ln/>
-          <a:effectLst>
-            <a:outerShdw sx="100000" sy="100000" kx="0" ky="0" algn="bl" rotWithShape="0" blurRad="76200" dist="25400" dir="8100000">
-              <a:srgbClr val="000000">
-                <a:alpha val="12000"/>
-              </a:srgbClr>
-            </a:outerShdw>
-          </a:effectLst>
-        </p:spPr>
-      </p:sp>
-      <p:sp>
-        <p:nvSpPr>
-          <p:cNvPr id="9" name="Shape 7"/>
-          <p:cNvSpPr/>
-          <p:nvPr/>
-        </p:nvSpPr>
-        <p:spPr>
-          <a:xfrm>
-            <a:off x="4937760" y="1508760"/>
-            <a:ext cx="502920" cy="502920"/>
-          </a:xfrm>
-          <a:prstGeom prst="ellipse">
-            <a:avLst/>
-          </a:prstGeom>
-          <a:solidFill>
-            <a:srgbClr val="0891B2"/>
-          </a:solidFill>
-          <a:ln/>
-        </p:spPr>
-      </p:sp>
-      <p:sp>
-        <p:nvSpPr>
-          <p:cNvPr id="10" name="Text 8"/>
-          <p:cNvSpPr/>
-          <p:nvPr/>
-        </p:nvSpPr>
-        <p:spPr>
-          <a:xfrm>
-            <a:off x="4937760" y="1508760"/>
-            <a:ext cx="502920" cy="502920"/>
-          </a:xfrm>
-          <a:prstGeom prst="rect">
-            <a:avLst/>
-          </a:prstGeom>
-          <a:noFill/>
-          <a:ln/>
-        </p:spPr>
-        <p:txBody>
-          <a:bodyPr wrap="square" lIns="0" tIns="0" rIns="0" bIns="0" rtlCol="0" anchor="ctr"/>
-          <a:lstStyle/>
-          <a:p>
-            <a:pPr algn="ctr" indent="0" marL="0">
-              <a:buNone/>
-            </a:pPr>
-            <a:r>
-              <a:rPr lang="en-US" sz="2000" b="1" dirty="0">
-                <a:solidFill>
-                  <a:srgbClr val="FFFFFF"/>
-                </a:solidFill>
-                <a:latin typeface="Calibri" pitchFamily="34" charset="0"/>
-                <a:ea typeface="Calibri" pitchFamily="34" charset="-122"/>
-                <a:cs typeface="Calibri" pitchFamily="34" charset="-120"/>
-              </a:rPr>
-              <a:t>2</a:t>
-            </a:r>
-            <a:endParaRPr lang="en-US" sz="2000" dirty="0"/>
-          </a:p>
-        </p:txBody>
-      </p:sp>
-      <p:sp>
-        <p:nvSpPr>
-          <p:cNvPr id="11" name="Text 9"/>
-          <p:cNvSpPr/>
-          <p:nvPr/>
-        </p:nvSpPr>
-        <p:spPr>
-          <a:xfrm>
-            <a:off x="5623560" y="1463040"/>
-            <a:ext cx="2468880" cy="365760"/>
-          </a:xfrm>
-          <a:prstGeom prst="rect">
-            <a:avLst/>
-          </a:prstGeom>
-          <a:noFill/>
-          <a:ln/>
-        </p:spPr>
-        <p:txBody>
-          <a:bodyPr wrap="square" lIns="0" tIns="0" rIns="0" bIns="0" rtlCol="0" anchor="ctr"/>
-          <a:lstStyle/>
-          <a:p>
-            <a:pPr indent="0" marL="0">
-              <a:buNone/>
-            </a:pPr>
-            <a:r>
-              <a:rPr lang="en-US" sz="1600" b="1" dirty="0">
-                <a:solidFill>
-                  <a:srgbClr val="1E293B"/>
-                </a:solidFill>
-                <a:latin typeface="Calibri" pitchFamily="34" charset="0"/>
-                <a:ea typeface="Calibri" pitchFamily="34" charset="-122"/>
-                <a:cs typeface="Calibri" pitchFamily="34" charset="-120"/>
-              </a:rPr>
-              <a:t>Code Blindly</a:t>
-            </a:r>
-            <a:endParaRPr lang="en-US" sz="1600" dirty="0"/>
-          </a:p>
-        </p:txBody>
-      </p:sp>
-      <p:sp>
-        <p:nvSpPr>
-          <p:cNvPr id="12" name="Text 10"/>
-          <p:cNvSpPr/>
-          <p:nvPr/>
-        </p:nvSpPr>
-        <p:spPr>
-          <a:xfrm>
-            <a:off x="5623560" y="1828800"/>
-            <a:ext cx="2468880" cy="457200"/>
-          </a:xfrm>
-          <a:prstGeom prst="rect">
-            <a:avLst/>
-          </a:prstGeom>
-          <a:noFill/>
-          <a:ln/>
-        </p:spPr>
-        <p:txBody>
-          <a:bodyPr wrap="square" lIns="0" tIns="0" rIns="0" bIns="0" rtlCol="0" anchor="ctr"/>
-          <a:lstStyle/>
-          <a:p>
-            <a:pPr indent="0" marL="0">
-              <a:buNone/>
-            </a:pPr>
-            <a:r>
-              <a:rPr lang="en-US" sz="1300" dirty="0">
-                <a:solidFill>
-                  <a:srgbClr val="475569"/>
-                </a:solidFill>
-                <a:latin typeface="Calibri" pitchFamily="34" charset="0"/>
-                <a:ea typeface="Calibri" pitchFamily="34" charset="-122"/>
-                <a:cs typeface="Calibri" pitchFamily="34" charset="-120"/>
-              </a:rPr>
-              <a:t>Independent coding of cases</a:t>
-            </a:r>
-            <a:endParaRPr lang="en-US" sz="1300" dirty="0"/>
-          </a:p>
-        </p:txBody>
-      </p:sp>
-      <p:sp>
-        <p:nvSpPr>
-          <p:cNvPr id="13" name="Shape 11"/>
-          <p:cNvSpPr/>
-          <p:nvPr/>
-        </p:nvSpPr>
-        <p:spPr>
-          <a:xfrm>
-            <a:off x="731520" y="2788920"/>
-            <a:ext cx="3657600" cy="1234440"/>
-          </a:xfrm>
-          <a:prstGeom prst="rect">
-            <a:avLst/>
-          </a:prstGeom>
-          <a:solidFill>
-            <a:srgbClr val="FFFFFF"/>
-          </a:solidFill>
-          <a:ln/>
-          <a:effectLst>
-            <a:outerShdw sx="100000" sy="100000" kx="0" ky="0" algn="bl" rotWithShape="0" blurRad="76200" dist="25400" dir="8100000">
-              <a:srgbClr val="000000">
-                <a:alpha val="12000"/>
-              </a:srgbClr>
-            </a:outerShdw>
-          </a:effectLst>
-        </p:spPr>
-      </p:sp>
-      <p:sp>
-        <p:nvSpPr>
-          <p:cNvPr id="14" name="Shape 12"/>
-          <p:cNvSpPr/>
-          <p:nvPr/>
-        </p:nvSpPr>
-        <p:spPr>
-          <a:xfrm>
-            <a:off x="914400" y="3017520"/>
-            <a:ext cx="502920" cy="502920"/>
-          </a:xfrm>
-          <a:prstGeom prst="ellipse">
-            <a:avLst/>
-          </a:prstGeom>
-          <a:solidFill>
-            <a:srgbClr val="0891B2"/>
-          </a:solidFill>
-          <a:ln/>
-        </p:spPr>
-      </p:sp>
-      <p:sp>
-        <p:nvSpPr>
-          <p:cNvPr id="15" name="Text 13"/>
-          <p:cNvSpPr/>
-          <p:nvPr/>
-        </p:nvSpPr>
-        <p:spPr>
-          <a:xfrm>
-            <a:off x="914400" y="3017520"/>
-            <a:ext cx="502920" cy="502920"/>
-          </a:xfrm>
-          <a:prstGeom prst="rect">
-            <a:avLst/>
-          </a:prstGeom>
-          <a:noFill/>
-          <a:ln/>
-        </p:spPr>
-        <p:txBody>
-          <a:bodyPr wrap="square" lIns="0" tIns="0" rIns="0" bIns="0" rtlCol="0" anchor="ctr"/>
-          <a:lstStyle/>
-          <a:p>
-            <a:pPr algn="ctr" indent="0" marL="0">
-              <a:buNone/>
-            </a:pPr>
-            <a:r>
-              <a:rPr lang="en-US" sz="2000" b="1" dirty="0">
-                <a:solidFill>
-                  <a:srgbClr val="FFFFFF"/>
-                </a:solidFill>
-                <a:latin typeface="Calibri" pitchFamily="34" charset="0"/>
-                <a:ea typeface="Calibri" pitchFamily="34" charset="-122"/>
-                <a:cs typeface="Calibri" pitchFamily="34" charset="-120"/>
-              </a:rPr>
-              <a:t>3</a:t>
-            </a:r>
-            <a:endParaRPr lang="en-US" sz="2000" dirty="0"/>
-          </a:p>
-        </p:txBody>
-      </p:sp>
-      <p:sp>
-        <p:nvSpPr>
-          <p:cNvPr id="16" name="Text 14"/>
-          <p:cNvSpPr/>
-          <p:nvPr/>
-        </p:nvSpPr>
-        <p:spPr>
-          <a:xfrm>
-            <a:off x="1600200" y="2971800"/>
-            <a:ext cx="2468880" cy="365760"/>
-          </a:xfrm>
-          <a:prstGeom prst="rect">
-            <a:avLst/>
-          </a:prstGeom>
-          <a:noFill/>
-          <a:ln/>
-        </p:spPr>
-        <p:txBody>
-          <a:bodyPr wrap="square" lIns="0" tIns="0" rIns="0" bIns="0" rtlCol="0" anchor="ctr"/>
-          <a:lstStyle/>
-          <a:p>
-            <a:pPr indent="0" marL="0">
-              <a:buNone/>
-            </a:pPr>
-            <a:r>
-              <a:rPr lang="en-US" sz="1600" b="1" dirty="0">
-                <a:solidFill>
-                  <a:srgbClr val="1E293B"/>
-                </a:solidFill>
-                <a:latin typeface="Calibri" pitchFamily="34" charset="0"/>
-                <a:ea typeface="Calibri" pitchFamily="34" charset="-122"/>
-                <a:cs typeface="Calibri" pitchFamily="34" charset="-120"/>
-              </a:rPr>
-              <a:t>Measure Agreement</a:t>
-            </a:r>
-            <a:endParaRPr lang="en-US" sz="1600" dirty="0"/>
-          </a:p>
-        </p:txBody>
-      </p:sp>
-      <p:sp>
-        <p:nvSpPr>
-          <p:cNvPr id="17" name="Text 15"/>
-          <p:cNvSpPr/>
-          <p:nvPr/>
-        </p:nvSpPr>
-        <p:spPr>
-          <a:xfrm>
-            <a:off x="1600200" y="3337560"/>
-            <a:ext cx="2468880" cy="457200"/>
-          </a:xfrm>
-          <a:prstGeom prst="rect">
-            <a:avLst/>
-          </a:prstGeom>
-          <a:noFill/>
-          <a:ln/>
-        </p:spPr>
-        <p:txBody>
-          <a:bodyPr wrap="square" lIns="0" tIns="0" rIns="0" bIns="0" rtlCol="0" anchor="ctr"/>
-          <a:lstStyle/>
-          <a:p>
-            <a:pPr indent="0" marL="0">
-              <a:buNone/>
-            </a:pPr>
-            <a:r>
-              <a:rPr lang="en-US" sz="1300" dirty="0">
-                <a:solidFill>
-                  <a:srgbClr val="475569"/>
-                </a:solidFill>
-                <a:latin typeface="Calibri" pitchFamily="34" charset="0"/>
-                <a:ea typeface="Calibri" pitchFamily="34" charset="-122"/>
-                <a:cs typeface="Calibri" pitchFamily="34" charset="-120"/>
-              </a:rPr>
-              <a:t>Inter-Rater Reliability (IRR)</a:t>
-            </a:r>
-            <a:endParaRPr lang="en-US" sz="1300" dirty="0"/>
-          </a:p>
-        </p:txBody>
-      </p:sp>
-      <p:sp>
-        <p:nvSpPr>
-          <p:cNvPr id="18" name="Shape 16"/>
-          <p:cNvSpPr/>
-          <p:nvPr/>
-        </p:nvSpPr>
-        <p:spPr>
-          <a:xfrm>
-            <a:off x="4754880" y="2788920"/>
-            <a:ext cx="3657600" cy="1234440"/>
-          </a:xfrm>
-          <a:prstGeom prst="rect">
-            <a:avLst/>
-          </a:prstGeom>
-          <a:solidFill>
-            <a:srgbClr val="FFFFFF"/>
-          </a:solidFill>
-          <a:ln/>
-          <a:effectLst>
-            <a:outerShdw sx="100000" sy="100000" kx="0" ky="0" algn="bl" rotWithShape="0" blurRad="76200" dist="25400" dir="8100000">
-              <a:srgbClr val="000000">
-                <a:alpha val="12000"/>
-              </a:srgbClr>
-            </a:outerShdw>
-          </a:effectLst>
-        </p:spPr>
-      </p:sp>
-      <p:sp>
-        <p:nvSpPr>
-          <p:cNvPr id="19" name="Shape 17"/>
-          <p:cNvSpPr/>
-          <p:nvPr/>
-        </p:nvSpPr>
-        <p:spPr>
-          <a:xfrm>
-            <a:off x="4937760" y="3017520"/>
-            <a:ext cx="502920" cy="502920"/>
-          </a:xfrm>
-          <a:prstGeom prst="ellipse">
-            <a:avLst/>
-          </a:prstGeom>
-          <a:solidFill>
-            <a:srgbClr val="0891B2"/>
-          </a:solidFill>
-          <a:ln/>
-        </p:spPr>
-      </p:sp>
-      <p:sp>
-        <p:nvSpPr>
-          <p:cNvPr id="20" name="Text 18"/>
-          <p:cNvSpPr/>
-          <p:nvPr/>
-        </p:nvSpPr>
-        <p:spPr>
-          <a:xfrm>
-            <a:off x="4937760" y="3017520"/>
-            <a:ext cx="502920" cy="502920"/>
-          </a:xfrm>
-          <a:prstGeom prst="rect">
-            <a:avLst/>
-          </a:prstGeom>
-          <a:noFill/>
-          <a:ln/>
-        </p:spPr>
-        <p:txBody>
-          <a:bodyPr wrap="square" lIns="0" tIns="0" rIns="0" bIns="0" rtlCol="0" anchor="ctr"/>
-          <a:lstStyle/>
-          <a:p>
-            <a:pPr algn="ctr" indent="0" marL="0">
-              <a:buNone/>
-            </a:pPr>
-            <a:r>
-              <a:rPr lang="en-US" sz="2000" b="1" dirty="0">
-                <a:solidFill>
-                  <a:srgbClr val="FFFFFF"/>
-                </a:solidFill>
-                <a:latin typeface="Calibri" pitchFamily="34" charset="0"/>
-                <a:ea typeface="Calibri" pitchFamily="34" charset="-122"/>
-                <a:cs typeface="Calibri" pitchFamily="34" charset="-120"/>
-              </a:rPr>
-              <a:t>4</a:t>
-            </a:r>
-            <a:endParaRPr lang="en-US" sz="2000" dirty="0"/>
-          </a:p>
-        </p:txBody>
-      </p:sp>
-      <p:sp>
-        <p:nvSpPr>
-          <p:cNvPr id="21" name="Text 19"/>
-          <p:cNvSpPr/>
-          <p:nvPr/>
-        </p:nvSpPr>
-        <p:spPr>
-          <a:xfrm>
-            <a:off x="5623560" y="2971800"/>
-            <a:ext cx="2468880" cy="365760"/>
-          </a:xfrm>
-          <a:prstGeom prst="rect">
-            <a:avLst/>
-          </a:prstGeom>
-          <a:noFill/>
-          <a:ln/>
-        </p:spPr>
-        <p:txBody>
-          <a:bodyPr wrap="square" lIns="0" tIns="0" rIns="0" bIns="0" rtlCol="0" anchor="ctr"/>
-          <a:lstStyle/>
-          <a:p>
-            <a:pPr indent="0" marL="0">
-              <a:buNone/>
-            </a:pPr>
-            <a:r>
-              <a:rPr lang="en-US" sz="1600" b="1" dirty="0">
-                <a:solidFill>
-                  <a:srgbClr val="1E293B"/>
-                </a:solidFill>
-                <a:latin typeface="Calibri" pitchFamily="34" charset="0"/>
-                <a:ea typeface="Calibri" pitchFamily="34" charset="-122"/>
-                <a:cs typeface="Calibri" pitchFamily="34" charset="-120"/>
-              </a:rPr>
-              <a:t>Ground Truth</a:t>
-            </a:r>
-            <a:endParaRPr lang="en-US" sz="1600" dirty="0"/>
-          </a:p>
-        </p:txBody>
-      </p:sp>
-      <p:sp>
-        <p:nvSpPr>
-          <p:cNvPr id="22" name="Text 20"/>
-          <p:cNvSpPr/>
-          <p:nvPr/>
-        </p:nvSpPr>
-        <p:spPr>
-          <a:xfrm>
-            <a:off x="5623560" y="3337560"/>
-            <a:ext cx="2468880" cy="457200"/>
-          </a:xfrm>
-          <a:prstGeom prst="rect">
-            <a:avLst/>
-          </a:prstGeom>
-          <a:noFill/>
-          <a:ln/>
-        </p:spPr>
-        <p:txBody>
-          <a:bodyPr wrap="square" lIns="0" tIns="0" rIns="0" bIns="0" rtlCol="0" anchor="ctr"/>
-          <a:lstStyle/>
-          <a:p>
-            <a:pPr indent="0" marL="0">
-              <a:buNone/>
-            </a:pPr>
-            <a:r>
-              <a:rPr lang="en-US" sz="1300" dirty="0">
-                <a:solidFill>
-                  <a:srgbClr val="475569"/>
-                </a:solidFill>
-                <a:latin typeface="Calibri" pitchFamily="34" charset="0"/>
-                <a:ea typeface="Calibri" pitchFamily="34" charset="-122"/>
-                <a:cs typeface="Calibri" pitchFamily="34" charset="-120"/>
-              </a:rPr>
-              <a:t>Cases where experts agree</a:t>
-            </a:r>
-            <a:endParaRPr lang="en-US" sz="1300" dirty="0"/>
-          </a:p>
-        </p:txBody>
-      </p:sp>
-      <p:sp>
-        <p:nvSpPr>
-          <p:cNvPr id="23" name="Text 21"/>
-          <p:cNvSpPr/>
-          <p:nvPr/>
-        </p:nvSpPr>
-        <p:spPr>
-          <a:xfrm>
-            <a:off x="731520" y="4297680"/>
-            <a:ext cx="7680960" cy="457200"/>
-          </a:xfrm>
-          <a:prstGeom prst="rect">
-            <a:avLst/>
-          </a:prstGeom>
-          <a:noFill/>
-          <a:ln/>
-        </p:spPr>
-        <p:txBody>
-          <a:bodyPr wrap="square" lIns="0" tIns="0" rIns="0" bIns="0" rtlCol="0" anchor="ctr"/>
-          <a:lstStyle/>
-          <a:p>
-            <a:pPr indent="0" marL="0">
-              <a:buNone/>
-            </a:pPr>
-            <a:r>
-              <a:rPr lang="en-US" sz="1800" b="1" i="1" dirty="0">
-                <a:solidFill>
-                  <a:srgbClr val="0891B2"/>
-                </a:solidFill>
-                <a:latin typeface="Georgia" pitchFamily="34" charset="0"/>
-                <a:ea typeface="Georgia" pitchFamily="34" charset="-122"/>
-                <a:cs typeface="Georgia" pitchFamily="34" charset="-120"/>
-              </a:rPr>
-              <a:t>The humans set the standard.</a:t>
-            </a:r>
-            <a:endParaRPr lang="en-US" sz="1800" dirty="0"/>
           </a:p>
         </p:txBody>
       </p:sp>
